--- a/site/showcase/exports/illustration_1.pptx
+++ b/site/showcase/exports/illustration_1.pptx
@@ -22,7 +22,6 @@
     <p:sldId id="270" r:id="rId22"/>
     <p:sldId id="271" r:id="rId23"/>
     <p:sldId id="272" r:id="rId24"/>
-    <p:sldId id="273" r:id="rId25"/>
   </p:sldIdLst>
   <p:sldSz cx="9144000" cy="6858000" type="screen4x3"/>
   <p:notesSz cx="6858000" cy="9144000"/>
@@ -1349,17 +1348,17 @@
           </a:p>
           <a:p>
             <a:r>
-              <a:t>Claude Vision | synthetic likelihood 85/100; tells: uniform digital-illustration style with inked outlines and painterly shading typical of current image generators, over-regular stippled texture in grey curly hair, wheelchair spoke and frame geometry inconsistent between wheels, with spokes merging and fading, tablet screen shows a generic, softly detailed garden scene with no UI elements</a:t>
-            </a:r>
-          </a:p>
-          <a:p>
-            <a:r>
-              <a:t>OpenAI Vision | synthetic likelihood 78/100; tells: Gray hair contains tangled, ribbon-like shapes inconsistent with the other hair rendering., Wheelchair spokes and frame supports intersect in mechanically ambiguous ways., Gesturing hands have uneven finger separation and awkward contours., Illustrated outlines and smooth shading throughout; no photographic base is evident.</a:t>
-            </a:r>
-          </a:p>
-          <a:p>
-            <a:r>
-              <a:t>Gemini Vision | synthetic likelihood 72/100; tells: digital illustration style with hyper-clean lines, typical diffusion model character rendering features, slight anatomical inconsistencies in hands and fingers, unusual blending around tablet screen integration</a:t>
+              <a:t>Claude Vision | synthetic likelihood 82/100; tells: not a camera photo: digital illustration in a uniform, polished comic/ink-and-colour style typical of current image generators, hyper-consistent line weight and cel shading across all figures with no stroke variation or construction marks, noisy, fragmented texture in the grey curly hair, resembling generator detail artifacts rather than deliberate strokes, tablet screen shows an indistinct garden/playground scene with smeared, non-specific detail</a:t>
+            </a:r>
+          </a:p>
+          <a:p>
+            <a:r>
+              <a:t>OpenAI Vision | synthetic likelihood 78/100; tells: Older woman's gray hair contains tangled, ribbon-like shapes inconsistent with the other hair rendering., Wheelchair spokes and lower frame tubes form irregular junctions and ambiguous connections., Gesturing hands have uneven finger separation and merged-looking contours., Tablet garden has noticeably softer, less defined detail than the surrounding outlined illustration.</a:t>
+            </a:r>
+          </a:p>
+          <a:p>
+            <a:r>
+              <a:t>Gemini Vision | synthetic likelihood 72/100; tells: stylized digital line art with subtle AI generative markers, irregular finger proportions and geometry, overly smooth shading gradients typical of generative models, inconsistent perspective on wheelchair spokes</a:t>
             </a:r>
           </a:p>
         </p:txBody>
@@ -1619,12 +1618,12 @@
           </a:p>
           <a:p>
             <a:r>
-              <a:t>Analysis ID | e2d54768-0627-4b09-8e9c-bab7b58c211f</a:t>
-            </a:r>
-          </a:p>
-          <a:p>
-            <a:r>
-              <a:t>Generated | 2026-09-26T17:54:47+00:00</a:t>
+              <a:t>Analysis ID | b5b0ad60-55ee-4036-9903-631bccce3d5b</a:t>
+            </a:r>
+          </a:p>
+          <a:p>
+            <a:r>
+              <a:t>Generated | 2026-09-26T22:31:03+00:00</a:t>
             </a:r>
           </a:p>
           <a:p>
@@ -1639,7 +1638,7 @@
           </a:p>
           <a:p>
             <a:r>
-              <a:t>Method version | verdict-consistency-2026-09-26.1</a:t>
+              <a:t>Method version | pdf-preparation-2026-09-26.1</a:t>
             </a:r>
           </a:p>
           <a:p>
@@ -1654,147 +1653,12 @@
           </a:p>
           <a:p>
             <a:r>
-              <a:t>Ingestion note 1 | Recomputed locally from the same saved provider replies acquired under run five-examples-20260926-r1. No new provider requests. Original report 6ed01bd6-3868-4680-ba90-536492d5c7ff was generated at 2026-09-26T17:38:40+00:00 under method publication-repair-2026-09-24.3; that report is preserved.</a:t>
-            </a:r>
-          </a:p>
-          <a:p>
-            <a:r>
-              <a:t>Ingestion note 2 | Method verdict-consistency-2026-09-26.1: directional model votes require matching explicit verdicts and rating thresholds. Inconclusive replies retain their ratings and remain undecided observations.</a:t>
-            </a:r>
-          </a:p>
-          <a:p>
-            <a:r>
-              <a:t>Ingestion note 3 | Presentation copy of saved report 6faeca61-589d-4810-8b3a-aec00dfb18e5. The descriptive filename replaces the earlier example ID for navigation. Original analysis dates, provider replies, scores and acquisition context are retained; no new model analysis.</a:t>
-            </a:r>
-          </a:p>
-        </p:txBody>
-      </p:sp>
-      <p:sp>
-        <p:nvSpPr>
-          <p:cNvPr id="4" name="Slide Number Placeholder 3"/>
-          <p:cNvSpPr>
-            <a:spLocks noGrp="1"/>
-          </p:cNvSpPr>
-          <p:nvPr>
-            <p:ph type="sldNum" idx="5" sz="quarter"/>
-          </p:nvPr>
-        </p:nvSpPr>
-        <p:spPr/>
-      </p:sp>
-    </p:spTree>
-  </p:cSld>
-  <p:clrMapOvr>
-    <a:masterClrMapping/>
-  </p:clrMapOvr>
-</p:notes>
-</file>
-
-<file path=ppt/notesSlides/notesSlide18.xml><?xml version="1.0" encoding="utf-8"?>
-<p:notes xmlns:a="http://schemas.openxmlformats.org/drawingml/2006/main" xmlns:p="http://schemas.openxmlformats.org/presentationml/2006/main" xmlns:r="http://schemas.openxmlformats.org/officeDocument/2006/relationships">
-  <p:cSld>
-    <p:spTree>
-      <p:nvGrpSpPr>
-        <p:cNvPr id="1" name=""/>
-        <p:cNvGrpSpPr/>
-        <p:nvPr/>
-      </p:nvGrpSpPr>
-      <p:grpSpPr>
-        <a:xfrm>
-          <a:off x="0" y="0"/>
-          <a:ext cx="0" cy="0"/>
-          <a:chOff x="0" y="0"/>
-          <a:chExt cx="0" cy="0"/>
-        </a:xfrm>
-      </p:grpSpPr>
-      <p:sp>
-        <p:nvSpPr>
-          <p:cNvPr id="2" name="Slide Image Placeholder 1"/>
-          <p:cNvSpPr>
-            <a:spLocks noGrp="1"/>
-          </p:cNvSpPr>
-          <p:nvPr>
-            <p:ph type="sldImg" idx="2"/>
-          </p:nvPr>
-        </p:nvSpPr>
-        <p:spPr/>
-      </p:sp>
-      <p:sp>
-        <p:nvSpPr>
-          <p:cNvPr id="3" name="Notes Placeholder 2"/>
-          <p:cNvSpPr>
-            <a:spLocks noGrp="1"/>
-          </p:cNvSpPr>
-          <p:nvPr>
-            <p:ph type="body" idx="3" sz="quarter"/>
-          </p:nvPr>
-        </p:nvSpPr>
-        <p:spPr/>
-        <p:txBody>
-          <a:bodyPr/>
-          <a:lstStyle/>
-          <a:p>
-            <a:r>
-              <a:t>illustration-1.png</a:t>
-            </a:r>
-          </a:p>
-          <a:p>
-            <a:r>
-              <a:t>File and analysis record</a:t>
-            </a:r>
-          </a:p>
-          <a:p>
-            <a:r>
-              <a:t>File | illustration-1.png</a:t>
-            </a:r>
-          </a:p>
-          <a:p>
-            <a:r>
-              <a:t>Analysis ID | e2d54768-0627-4b09-8e9c-bab7b58c211f</a:t>
-            </a:r>
-          </a:p>
-          <a:p>
-            <a:r>
-              <a:t>Generated | 2026-09-26T17:54:47+00:00</a:t>
-            </a:r>
-          </a:p>
-          <a:p>
-            <a:r>
-              <a:t>Tool | SDA Vision 0.1.0</a:t>
-            </a:r>
-          </a:p>
-          <a:p>
-            <a:r>
-              <a:t>Models | claude-opus-5-5, gemini-3.8-flash, gpt-6-astra</a:t>
-            </a:r>
-          </a:p>
-          <a:p>
-            <a:r>
-              <a:t>Method version | verdict-consistency-2026-09-26.1</a:t>
-            </a:r>
-          </a:p>
-          <a:p>
-            <a:r>
-              <a:t>Analysis lens | general</a:t>
-            </a:r>
-          </a:p>
-          <a:p>
-            <a:r>
-              <a:t>Original SHA-256 | 137f1b7c292c882be741e1a6c881ab4a2082c7dd6ab2181d63304000a0d92252</a:t>
-            </a:r>
-          </a:p>
-          <a:p>
-            <a:r>
-              <a:t>Ingestion note 1 | Recomputed locally from the same saved provider replies acquired under run five-examples-20260926-r1. No new provider requests. Original report 6ed01bd6-3868-4680-ba90-536492d5c7ff was generated at 2026-09-26T17:38:40+00:00 under method publication-repair-2026-09-24.3; that report is preserved.</a:t>
-            </a:r>
-          </a:p>
-          <a:p>
-            <a:r>
-              <a:t>Ingestion note 2 | Method verdict-consistency-2026-09-26.1: directional model votes require matching explicit verdicts and rating thresholds. Inconclusive replies retain their ratings and remain undecided observations.</a:t>
-            </a:r>
-          </a:p>
-          <a:p>
-            <a:r>
-              <a:t>Ingestion note 3 | Presentation copy of saved report 6faeca61-589d-4810-8b3a-aec00dfb18e5. The descriptive filename replaces the earlier example ID for navigation. Original analysis dates, provider replies, scores and acquisition context are retained; no new model analysis.</a:t>
+              <a:t>Ingestion note 1 | Fresh provider replies acquired for eleven-examples-refresh-20260926-r1; report assembled locally from the saved responses without further API calls.</a:t>
+            </a:r>
+          </a:p>
+          <a:p>
+            <a:r>
+              <a:t>Ingestion note 2 | Provider latency values are restored from the acquisition receipts (maximum sampled-frame latency per provider); raw replies and assessment results are unchanged by this bookkeeping step.</a:t>
             </a:r>
           </a:p>
         </p:txBody>
@@ -1989,7 +1853,7 @@
           </a:p>
           <a:p>
             <a:r>
-              <a:t>Claude Vision | vision / ok | synthetic likely | 85/100</a:t>
+              <a:t>Claude Vision | vision / ok | synthetic likely | 82/100</a:t>
             </a:r>
           </a:p>
           <a:p>
@@ -2119,52 +1983,47 @@
           </a:p>
           <a:p>
             <a:r>
-              <a:t>Provider summary | synthetic likelihood 85/100; tells: uniform digital-illustration style with inked outlines and painterly shading typical of current image generators, over-regular stippled texture in grey curly hair, wheelchair spoke and frame geometry inconsistent between wheels, with spokes merging and fading, tablet screen shows a generic, softly detailed garden scene with no UI elements</a:t>
-            </a:r>
-          </a:p>
-          <a:p>
-            <a:r>
-              <a:t>Evidence 1 | Uniform digital-illustration style with inked outlines and painterly shading typical of current image generators</a:t>
-            </a:r>
-          </a:p>
-          <a:p>
-            <a:r>
-              <a:t>Evidence 2 | Over-regular stippled texture in grey curly hair</a:t>
-            </a:r>
-          </a:p>
-          <a:p>
-            <a:r>
-              <a:t>Evidence 3 | Wheelchair spoke and frame geometry inconsistent between wheels, with spokes merging and fading</a:t>
-            </a:r>
-          </a:p>
-          <a:p>
-            <a:r>
-              <a:t>Evidence 4 | Tablet screen shows a generic, softly detailed garden scene with no UI elements</a:t>
-            </a:r>
-          </a:p>
-          <a:p>
-            <a:r>
-              <a:t>Evidence 5 | Hands plausible but slightly smoothed, with simplified finger joints</a:t>
-            </a:r>
-          </a:p>
-          <a:p>
-            <a:r>
-              <a:t>Evidence 6 | Wheelchair and basketball rendered at high detail while the table base is very simple</a:t>
-            </a:r>
-          </a:p>
-          <a:p>
-            <a:r>
-              <a:t>Evidence 7 | Clean white background with slight halo/edge fringing around figures</a:t>
-            </a:r>
-          </a:p>
-          <a:p>
-            <a:r>
-              <a:t>Evidence 8 | No camera signals (not a photograph), so lens/noise analysis not applicable</a:t>
-            </a:r>
-          </a:p>
-          <a:p>
-            <a:r>
-              <a:t>Evidence 9 | Caveat: This is an illustration, not a photo, so the rating reflects stylistic generator tells versus human digital artwork. Skilled human illustrators can produce similar results, so provenance metadata or the source should be checked.</a:t>
+              <a:t>Provider summary | synthetic likelihood 82/100; tells: not a camera photo: digital illustration in a uniform, polished comic/ink-and-colour style typical of current image generators, hyper-consistent line weight and cel shading across all figures with no stroke variation or construction marks, noisy, fragmented texture in the grey curly hair, resembling generator detail artifacts rather than deliberate strokes, tablet screen shows an indistinct garden/playground scene with smeared, non-specific detail</a:t>
+            </a:r>
+          </a:p>
+          <a:p>
+            <a:r>
+              <a:t>Evidence 1 | Not a camera photo: digital illustration in a uniform, polished comic/ink-and-colour style typical of current image generators</a:t>
+            </a:r>
+          </a:p>
+          <a:p>
+            <a:r>
+              <a:t>Evidence 2 | Hyper-consistent line weight and cel shading across all figures with no stroke variation or construction marks</a:t>
+            </a:r>
+          </a:p>
+          <a:p>
+            <a:r>
+              <a:t>Evidence 3 | Noisy, fragmented texture in the grey curly hair, resembling generator detail artifacts rather than deliberate strokes</a:t>
+            </a:r>
+          </a:p>
+          <a:p>
+            <a:r>
+              <a:t>Evidence 4 | Tablet screen shows an indistinct garden/playground scene with smeared, non-specific detail</a:t>
+            </a:r>
+          </a:p>
+          <a:p>
+            <a:r>
+              <a:t>Evidence 5 | Wheelchair spokes and frame are mostly plausible but slightly irregular in spacing and junctions</a:t>
+            </a:r>
+          </a:p>
+          <a:p>
+            <a:r>
+              <a:t>Evidence 6 | Hands are well formed overall, which lowers but does not remove suspicion</a:t>
+            </a:r>
+          </a:p>
+          <a:p>
+            <a:r>
+              <a:t>Evidence 7 | Stock-style composition, clean white background, no signature, no watermark</a:t>
+            </a:r>
+          </a:p>
+          <a:p>
+            <a:r>
+              <a:t>Evidence 8 | Caveat: Skilled human digital illustrators can produce this polished style, and the hands and anatomy are largely coherent. Style cues alone cannot confirm AI origin, so check file metadata/C2PA, the artist's source, or reverse image search.</a:t>
             </a:r>
           </a:p>
         </p:txBody>
@@ -2274,52 +2133,47 @@
           </a:p>
           <a:p>
             <a:r>
-              <a:t>Provider summary | synthetic likelihood 85/100; tells: uniform digital-illustration style with inked outlines and painterly shading typical of current image generators, over-regular stippled texture in grey curly hair, wheelchair spoke and frame geometry inconsistent between wheels, with spokes merging and fading, tablet screen shows a generic, softly detailed garden scene with no UI elements</a:t>
-            </a:r>
-          </a:p>
-          <a:p>
-            <a:r>
-              <a:t>Evidence 1 | Uniform digital-illustration style with inked outlines and painterly shading typical of current image generators</a:t>
-            </a:r>
-          </a:p>
-          <a:p>
-            <a:r>
-              <a:t>Evidence 2 | Over-regular stippled texture in grey curly hair</a:t>
-            </a:r>
-          </a:p>
-          <a:p>
-            <a:r>
-              <a:t>Evidence 3 | Wheelchair spoke and frame geometry inconsistent between wheels, with spokes merging and fading</a:t>
-            </a:r>
-          </a:p>
-          <a:p>
-            <a:r>
-              <a:t>Evidence 4 | Tablet screen shows a generic, softly detailed garden scene with no UI elements</a:t>
-            </a:r>
-          </a:p>
-          <a:p>
-            <a:r>
-              <a:t>Evidence 5 | Hands plausible but slightly smoothed, with simplified finger joints</a:t>
-            </a:r>
-          </a:p>
-          <a:p>
-            <a:r>
-              <a:t>Evidence 6 | Wheelchair and basketball rendered at high detail while the table base is very simple</a:t>
-            </a:r>
-          </a:p>
-          <a:p>
-            <a:r>
-              <a:t>Evidence 7 | Clean white background with slight halo/edge fringing around figures</a:t>
-            </a:r>
-          </a:p>
-          <a:p>
-            <a:r>
-              <a:t>Evidence 8 | No camera signals (not a photograph), so lens/noise analysis not applicable</a:t>
-            </a:r>
-          </a:p>
-          <a:p>
-            <a:r>
-              <a:t>Evidence 9 | Caveat: This is an illustration, not a photo, so the rating reflects stylistic generator tells versus human digital artwork. Skilled human illustrators can produce similar results, so provenance metadata or the source should be checked.</a:t>
+              <a:t>Provider summary | synthetic likelihood 82/100; tells: not a camera photo: digital illustration in a uniform, polished comic/ink-and-colour style typical of current image generators, hyper-consistent line weight and cel shading across all figures with no stroke variation or construction marks, noisy, fragmented texture in the grey curly hair, resembling generator detail artifacts rather than deliberate strokes, tablet screen shows an indistinct garden/playground scene with smeared, non-specific detail</a:t>
+            </a:r>
+          </a:p>
+          <a:p>
+            <a:r>
+              <a:t>Evidence 1 | Not a camera photo: digital illustration in a uniform, polished comic/ink-and-colour style typical of current image generators</a:t>
+            </a:r>
+          </a:p>
+          <a:p>
+            <a:r>
+              <a:t>Evidence 2 | Hyper-consistent line weight and cel shading across all figures with no stroke variation or construction marks</a:t>
+            </a:r>
+          </a:p>
+          <a:p>
+            <a:r>
+              <a:t>Evidence 3 | Noisy, fragmented texture in the grey curly hair, resembling generator detail artifacts rather than deliberate strokes</a:t>
+            </a:r>
+          </a:p>
+          <a:p>
+            <a:r>
+              <a:t>Evidence 4 | Tablet screen shows an indistinct garden/playground scene with smeared, non-specific detail</a:t>
+            </a:r>
+          </a:p>
+          <a:p>
+            <a:r>
+              <a:t>Evidence 5 | Wheelchair spokes and frame are mostly plausible but slightly irregular in spacing and junctions</a:t>
+            </a:r>
+          </a:p>
+          <a:p>
+            <a:r>
+              <a:t>Evidence 6 | Hands are well formed overall, which lowers but does not remove suspicion</a:t>
+            </a:r>
+          </a:p>
+          <a:p>
+            <a:r>
+              <a:t>Evidence 7 | Stock-style composition, clean white background, no signature, no watermark</a:t>
+            </a:r>
+          </a:p>
+          <a:p>
+            <a:r>
+              <a:t>Evidence 8 | Caveat: Skilled human digital illustrators can produce this polished style, and the hands and anatomy are largely coherent. Style cues alone cannot confirm AI origin, so check file metadata/C2PA, the artist's source, or reverse image search.</a:t>
             </a:r>
           </a:p>
         </p:txBody>
@@ -2429,32 +2283,32 @@
           </a:p>
           <a:p>
             <a:r>
-              <a:t>Provider summary | synthetic likelihood 78/100; tells: Gray hair contains tangled, ribbon-like shapes inconsistent with the other hair rendering., Wheelchair spokes and frame supports intersect in mechanically ambiguous ways., Gesturing hands have uneven finger separation and awkward contours., Illustrated outlines and smooth shading throughout; no photographic base is evident.</a:t>
-            </a:r>
-          </a:p>
-          <a:p>
-            <a:r>
-              <a:t>Evidence 1 | Gray hair contains tangled, ribbon-like shapes inconsistent with the other hair rendering.</a:t>
-            </a:r>
-          </a:p>
-          <a:p>
-            <a:r>
-              <a:t>Evidence 2 | Wheelchair spokes and frame supports intersect in mechanically ambiguous ways.</a:t>
-            </a:r>
-          </a:p>
-          <a:p>
-            <a:r>
-              <a:t>Evidence 3 | Gesturing hands have uneven finger separation and awkward contours.</a:t>
-            </a:r>
-          </a:p>
-          <a:p>
-            <a:r>
-              <a:t>Evidence 4 | Illustrated outlines and smooth shading throughout; no photographic base is evident.</a:t>
-            </a:r>
-          </a:p>
-          <a:p>
-            <a:r>
-              <a:t>Evidence 5 | Caveat: This is a stylized illustration; human-drawn or stock artwork can share these irregularities, so source provenance should be checked.</a:t>
+              <a:t>Provider summary | synthetic likelihood 78/100; tells: Older woman's gray hair contains tangled, ribbon-like shapes inconsistent with the other hair rendering., Wheelchair spokes and lower frame tubes form irregular junctions and ambiguous connections., Gesturing hands have uneven finger separation and merged-looking contours., Tablet garden has noticeably softer, less defined detail than the surrounding outlined illustration.</a:t>
+            </a:r>
+          </a:p>
+          <a:p>
+            <a:r>
+              <a:t>Evidence 1 | Older woman's gray hair contains tangled, ribbon-like shapes inconsistent with the other hair rendering.</a:t>
+            </a:r>
+          </a:p>
+          <a:p>
+            <a:r>
+              <a:t>Evidence 2 | Wheelchair spokes and lower frame tubes form irregular junctions and ambiguous connections.</a:t>
+            </a:r>
+          </a:p>
+          <a:p>
+            <a:r>
+              <a:t>Evidence 3 | Gesturing hands have uneven finger separation and merged-looking contours.</a:t>
+            </a:r>
+          </a:p>
+          <a:p>
+            <a:r>
+              <a:t>Evidence 4 | Tablet garden has noticeably softer, less defined detail than the surrounding outlined illustration.</a:t>
+            </a:r>
+          </a:p>
+          <a:p>
+            <a:r>
+              <a:t>Evidence 5 | Caveat: This is a digital illustration, not a photograph; stylized drawing errors alone cannot establish AI origin without provenance.</a:t>
             </a:r>
           </a:p>
         </p:txBody>
@@ -2564,32 +2418,32 @@
           </a:p>
           <a:p>
             <a:r>
-              <a:t>Provider summary | synthetic likelihood 78/100; tells: Gray hair contains tangled, ribbon-like shapes inconsistent with the other hair rendering., Wheelchair spokes and frame supports intersect in mechanically ambiguous ways., Gesturing hands have uneven finger separation and awkward contours., Illustrated outlines and smooth shading throughout; no photographic base is evident.</a:t>
-            </a:r>
-          </a:p>
-          <a:p>
-            <a:r>
-              <a:t>Evidence 1 | Gray hair contains tangled, ribbon-like shapes inconsistent with the other hair rendering.</a:t>
-            </a:r>
-          </a:p>
-          <a:p>
-            <a:r>
-              <a:t>Evidence 2 | Wheelchair spokes and frame supports intersect in mechanically ambiguous ways.</a:t>
-            </a:r>
-          </a:p>
-          <a:p>
-            <a:r>
-              <a:t>Evidence 3 | Gesturing hands have uneven finger separation and awkward contours.</a:t>
-            </a:r>
-          </a:p>
-          <a:p>
-            <a:r>
-              <a:t>Evidence 4 | Illustrated outlines and smooth shading throughout; no photographic base is evident.</a:t>
-            </a:r>
-          </a:p>
-          <a:p>
-            <a:r>
-              <a:t>Evidence 5 | Caveat: This is a stylized illustration; human-drawn or stock artwork can share these irregularities, so source provenance should be checked.</a:t>
+              <a:t>Provider summary | synthetic likelihood 78/100; tells: Older woman's gray hair contains tangled, ribbon-like shapes inconsistent with the other hair rendering., Wheelchair spokes and lower frame tubes form irregular junctions and ambiguous connections., Gesturing hands have uneven finger separation and merged-looking contours., Tablet garden has noticeably softer, less defined detail than the surrounding outlined illustration.</a:t>
+            </a:r>
+          </a:p>
+          <a:p>
+            <a:r>
+              <a:t>Evidence 1 | Older woman's gray hair contains tangled, ribbon-like shapes inconsistent with the other hair rendering.</a:t>
+            </a:r>
+          </a:p>
+          <a:p>
+            <a:r>
+              <a:t>Evidence 2 | Wheelchair spokes and lower frame tubes form irregular junctions and ambiguous connections.</a:t>
+            </a:r>
+          </a:p>
+          <a:p>
+            <a:r>
+              <a:t>Evidence 3 | Gesturing hands have uneven finger separation and merged-looking contours.</a:t>
+            </a:r>
+          </a:p>
+          <a:p>
+            <a:r>
+              <a:t>Evidence 4 | Tablet garden has noticeably softer, less defined detail than the surrounding outlined illustration.</a:t>
+            </a:r>
+          </a:p>
+          <a:p>
+            <a:r>
+              <a:t>Evidence 5 | Caveat: This is a digital illustration, not a photograph; stylized drawing errors alone cannot establish AI origin without provenance.</a:t>
             </a:r>
           </a:p>
         </p:txBody>
@@ -2699,32 +2553,32 @@
           </a:p>
           <a:p>
             <a:r>
-              <a:t>Provider summary | synthetic likelihood 72/100; tells: digital illustration style with hyper-clean lines, typical diffusion model character rendering features, slight anatomical inconsistencies in hands and fingers, unusual blending around tablet screen integration</a:t>
-            </a:r>
-          </a:p>
-          <a:p>
-            <a:r>
-              <a:t>Evidence 1 | Digital illustration style with hyper-clean lines</a:t>
-            </a:r>
-          </a:p>
-          <a:p>
-            <a:r>
-              <a:t>Evidence 2 | Typical diffusion model character rendering features</a:t>
-            </a:r>
-          </a:p>
-          <a:p>
-            <a:r>
-              <a:t>Evidence 3 | Slight anatomical inconsistencies in hands and fingers</a:t>
-            </a:r>
-          </a:p>
-          <a:p>
-            <a:r>
-              <a:t>Evidence 4 | Unusual blending around tablet screen integration</a:t>
-            </a:r>
-          </a:p>
-          <a:p>
-            <a:r>
-              <a:t>Evidence 5 | Caveat: Vector or digital human art can closely mimic generative cartoon styles.</a:t>
+              <a:t>Provider summary | synthetic likelihood 72/100; tells: stylized digital line art with subtle AI generative markers, irregular finger proportions and geometry, overly smooth shading gradients typical of generative models, inconsistent perspective on wheelchair spokes</a:t>
+            </a:r>
+          </a:p>
+          <a:p>
+            <a:r>
+              <a:t>Evidence 1 | Stylized digital line art with subtle AI generative markers</a:t>
+            </a:r>
+          </a:p>
+          <a:p>
+            <a:r>
+              <a:t>Evidence 2 | Irregular finger proportions and geometry</a:t>
+            </a:r>
+          </a:p>
+          <a:p>
+            <a:r>
+              <a:t>Evidence 3 | Overly smooth shading gradients typical of generative models</a:t>
+            </a:r>
+          </a:p>
+          <a:p>
+            <a:r>
+              <a:t>Evidence 4 | Inconsistent perspective on wheelchair spokes</a:t>
+            </a:r>
+          </a:p>
+          <a:p>
+            <a:r>
+              <a:t>Evidence 5 | Caveat: High-quality human digital vector/raster illustrations often closely resemble generative 2D art styles.</a:t>
             </a:r>
           </a:p>
         </p:txBody>
@@ -2834,32 +2688,32 @@
           </a:p>
           <a:p>
             <a:r>
-              <a:t>Provider summary | synthetic likelihood 72/100; tells: digital illustration style with hyper-clean lines, typical diffusion model character rendering features, slight anatomical inconsistencies in hands and fingers, unusual blending around tablet screen integration</a:t>
-            </a:r>
-          </a:p>
-          <a:p>
-            <a:r>
-              <a:t>Evidence 1 | Digital illustration style with hyper-clean lines</a:t>
-            </a:r>
-          </a:p>
-          <a:p>
-            <a:r>
-              <a:t>Evidence 2 | Typical diffusion model character rendering features</a:t>
-            </a:r>
-          </a:p>
-          <a:p>
-            <a:r>
-              <a:t>Evidence 3 | Slight anatomical inconsistencies in hands and fingers</a:t>
-            </a:r>
-          </a:p>
-          <a:p>
-            <a:r>
-              <a:t>Evidence 4 | Unusual blending around tablet screen integration</a:t>
-            </a:r>
-          </a:p>
-          <a:p>
-            <a:r>
-              <a:t>Evidence 5 | Caveat: Vector or digital human art can closely mimic generative cartoon styles.</a:t>
+              <a:t>Provider summary | synthetic likelihood 72/100; tells: stylized digital line art with subtle AI generative markers, irregular finger proportions and geometry, overly smooth shading gradients typical of generative models, inconsistent perspective on wheelchair spokes</a:t>
+            </a:r>
+          </a:p>
+          <a:p>
+            <a:r>
+              <a:t>Evidence 1 | Stylized digital line art with subtle AI generative markers</a:t>
+            </a:r>
+          </a:p>
+          <a:p>
+            <a:r>
+              <a:t>Evidence 2 | Irregular finger proportions and geometry</a:t>
+            </a:r>
+          </a:p>
+          <a:p>
+            <a:r>
+              <a:t>Evidence 3 | Overly smooth shading gradients typical of generative models</a:t>
+            </a:r>
+          </a:p>
+          <a:p>
+            <a:r>
+              <a:t>Evidence 4 | Inconsistent perspective on wheelchair spokes</a:t>
+            </a:r>
+          </a:p>
+          <a:p>
+            <a:r>
+              <a:t>Evidence 5 | Caveat: High-quality human digital vector/raster illustrations often closely resemble generative 2D art styles.</a:t>
             </a:r>
           </a:p>
         </p:txBody>
@@ -10868,7 +10722,7 @@
         </p:nvGraphicFramePr>
         <p:xfrm>
           <a:off x="365760" y="1700784"/>
-          <a:ext cx="8412479" cy="1162304"/>
+          <a:ext cx="8412479" cy="1365503"/>
         </p:xfrm>
         <a:graphic>
           <a:graphicData uri="http://schemas.openxmlformats.org/drawingml/2006/table">
@@ -10880,7 +10734,7 @@
                 <a:gridCol w="2271369"/>
                 <a:gridCol w="6141110"/>
               </a:tblGrid>
-              <a:tr h="1162304">
+              <a:tr h="1365503">
                 <a:tc>
                   <a:txBody>
                     <a:bodyPr wrap="none"/>
@@ -10931,83 +10785,102 @@
                         </a:defRPr>
                       </a:pPr>
                       <a:r>
-                        <a:t>synthetic likelihood 85/100; tells: uniform digital-illustration style with inked</a:t>
-                      </a:r>
-                    </a:p>
-                    <a:p>
-                      <a:pPr>
-                        <a:lnSpc>
-                          <a:spcPts val="1600"/>
-                        </a:lnSpc>
-                        <a:spcAft>
-                          <a:spcPts val="0"/>
-                        </a:spcAft>
-                        <a:defRPr sz="1200" b="0">
-                          <a:solidFill>
-                            <a:srgbClr val="21243A"/>
-                          </a:solidFill>
-                          <a:latin typeface="Arial"/>
-                        </a:defRPr>
-                      </a:pPr>
-                      <a:r>
-                        <a:t>outlines and painterly shading typical of current image generators, over-regular</a:t>
-                      </a:r>
-                    </a:p>
-                    <a:p>
-                      <a:pPr>
-                        <a:lnSpc>
-                          <a:spcPts val="1600"/>
-                        </a:lnSpc>
-                        <a:spcAft>
-                          <a:spcPts val="0"/>
-                        </a:spcAft>
-                        <a:defRPr sz="1200" b="0">
-                          <a:solidFill>
-                            <a:srgbClr val="21243A"/>
-                          </a:solidFill>
-                          <a:latin typeface="Arial"/>
-                        </a:defRPr>
-                      </a:pPr>
-                      <a:r>
-                        <a:t>stippled texture in grey curly hair, wheelchair spoke and frame geometry</a:t>
-                      </a:r>
-                    </a:p>
-                    <a:p>
-                      <a:pPr>
-                        <a:lnSpc>
-                          <a:spcPts val="1600"/>
-                        </a:lnSpc>
-                        <a:spcAft>
-                          <a:spcPts val="0"/>
-                        </a:spcAft>
-                        <a:defRPr sz="1200" b="0">
-                          <a:solidFill>
-                            <a:srgbClr val="21243A"/>
-                          </a:solidFill>
-                          <a:latin typeface="Arial"/>
-                        </a:defRPr>
-                      </a:pPr>
-                      <a:r>
-                        <a:t>inconsistent between wheels, with spokes merging and fading, tablet screen</a:t>
-                      </a:r>
-                    </a:p>
-                    <a:p>
-                      <a:pPr>
-                        <a:lnSpc>
-                          <a:spcPts val="1600"/>
-                        </a:lnSpc>
-                        <a:spcAft>
-                          <a:spcPts val="0"/>
-                        </a:spcAft>
-                        <a:defRPr sz="1200" b="0">
-                          <a:solidFill>
-                            <a:srgbClr val="21243A"/>
-                          </a:solidFill>
-                          <a:latin typeface="Arial"/>
-                        </a:defRPr>
-                      </a:pPr>
-                      <a:r>
-                        <a:t>shows a generic, softly detailed garden scene with no UI elements</a:t>
+                        <a:t>synthetic likelihood 82/100; tells: not a camera photo: digital illustration in a</a:t>
+                      </a:r>
+                    </a:p>
+                    <a:p>
+                      <a:pPr>
+                        <a:lnSpc>
+                          <a:spcPts val="1600"/>
+                        </a:lnSpc>
+                        <a:spcAft>
+                          <a:spcPts val="0"/>
+                        </a:spcAft>
+                        <a:defRPr sz="1200" b="0">
+                          <a:solidFill>
+                            <a:srgbClr val="21243A"/>
+                          </a:solidFill>
+                          <a:latin typeface="Arial"/>
+                        </a:defRPr>
+                      </a:pPr>
+                      <a:r>
+                        <a:t>uniform, polished comic/ink-and-colour style typical of current image generators,</a:t>
+                      </a:r>
+                    </a:p>
+                    <a:p>
+                      <a:pPr>
+                        <a:lnSpc>
+                          <a:spcPts val="1600"/>
+                        </a:lnSpc>
+                        <a:spcAft>
+                          <a:spcPts val="0"/>
+                        </a:spcAft>
+                        <a:defRPr sz="1200" b="0">
+                          <a:solidFill>
+                            <a:srgbClr val="21243A"/>
+                          </a:solidFill>
+                          <a:latin typeface="Arial"/>
+                        </a:defRPr>
+                      </a:pPr>
+                      <a:r>
+                        <a:t>hyper-consistent line weight and cel shading across all figures with no stroke</a:t>
+                      </a:r>
+                    </a:p>
+                    <a:p>
+                      <a:pPr>
+                        <a:lnSpc>
+                          <a:spcPts val="1600"/>
+                        </a:lnSpc>
+                        <a:spcAft>
+                          <a:spcPts val="0"/>
+                        </a:spcAft>
+                        <a:defRPr sz="1200" b="0">
+                          <a:solidFill>
+                            <a:srgbClr val="21243A"/>
+                          </a:solidFill>
+                          <a:latin typeface="Arial"/>
+                        </a:defRPr>
+                      </a:pPr>
+                      <a:r>
+                        <a:t>variation or construction marks, noisy, fragmented texture in the grey curly hair,</a:t>
+                      </a:r>
+                    </a:p>
+                    <a:p>
+                      <a:pPr>
+                        <a:lnSpc>
+                          <a:spcPts val="1600"/>
+                        </a:lnSpc>
+                        <a:spcAft>
+                          <a:spcPts val="0"/>
+                        </a:spcAft>
+                        <a:defRPr sz="1200" b="0">
+                          <a:solidFill>
+                            <a:srgbClr val="21243A"/>
+                          </a:solidFill>
+                          <a:latin typeface="Arial"/>
+                        </a:defRPr>
+                      </a:pPr>
+                      <a:r>
+                        <a:t>resembling generator detail artifacts rather than deliberate strokes, tablet screen</a:t>
+                      </a:r>
+                    </a:p>
+                    <a:p>
+                      <a:pPr>
+                        <a:lnSpc>
+                          <a:spcPts val="1600"/>
+                        </a:lnSpc>
+                        <a:spcAft>
+                          <a:spcPts val="0"/>
+                        </a:spcAft>
+                        <a:defRPr sz="1200" b="0">
+                          <a:solidFill>
+                            <a:srgbClr val="21243A"/>
+                          </a:solidFill>
+                          <a:latin typeface="Arial"/>
+                        </a:defRPr>
+                      </a:pPr>
+                      <a:r>
+                        <a:t>shows an indistinct garden/playground scene with smeared, non-specific detail</a:t>
                       </a:r>
                     </a:p>
                   </a:txBody>
@@ -11031,8 +10904,8 @@
           <p:nvPr/>
         </p:nvGraphicFramePr>
         <p:xfrm>
-          <a:off x="365760" y="2863088"/>
-          <a:ext cx="8412479" cy="1162304"/>
+          <a:off x="365760" y="3066288"/>
+          <a:ext cx="8412479" cy="1365503"/>
         </p:xfrm>
         <a:graphic>
           <a:graphicData uri="http://schemas.openxmlformats.org/drawingml/2006/table">
@@ -11044,7 +10917,7 @@
                 <a:gridCol w="2271369"/>
                 <a:gridCol w="6141110"/>
               </a:tblGrid>
-              <a:tr h="1162304">
+              <a:tr h="1365503">
                 <a:tc>
                   <a:txBody>
                     <a:bodyPr wrap="none"/>
@@ -11095,83 +10968,102 @@
                         </a:defRPr>
                       </a:pPr>
                       <a:r>
-                        <a:t>synthetic likelihood 78/100; tells: Gray hair contains tangled, ribbon-like shapes</a:t>
-                      </a:r>
-                    </a:p>
-                    <a:p>
-                      <a:pPr>
-                        <a:lnSpc>
-                          <a:spcPts val="1600"/>
-                        </a:lnSpc>
-                        <a:spcAft>
-                          <a:spcPts val="0"/>
-                        </a:spcAft>
-                        <a:defRPr sz="1200" b="0">
-                          <a:solidFill>
-                            <a:srgbClr val="21243A"/>
-                          </a:solidFill>
-                          <a:latin typeface="Arial"/>
-                        </a:defRPr>
-                      </a:pPr>
-                      <a:r>
-                        <a:t>inconsistent with the other hair rendering., Wheelchair spokes and frame</a:t>
-                      </a:r>
-                    </a:p>
-                    <a:p>
-                      <a:pPr>
-                        <a:lnSpc>
-                          <a:spcPts val="1600"/>
-                        </a:lnSpc>
-                        <a:spcAft>
-                          <a:spcPts val="0"/>
-                        </a:spcAft>
-                        <a:defRPr sz="1200" b="0">
-                          <a:solidFill>
-                            <a:srgbClr val="21243A"/>
-                          </a:solidFill>
-                          <a:latin typeface="Arial"/>
-                        </a:defRPr>
-                      </a:pPr>
-                      <a:r>
-                        <a:t>supports intersect in mechanically ambiguous ways., Gesturing hands have</a:t>
-                      </a:r>
-                    </a:p>
-                    <a:p>
-                      <a:pPr>
-                        <a:lnSpc>
-                          <a:spcPts val="1600"/>
-                        </a:lnSpc>
-                        <a:spcAft>
-                          <a:spcPts val="0"/>
-                        </a:spcAft>
-                        <a:defRPr sz="1200" b="0">
-                          <a:solidFill>
-                            <a:srgbClr val="21243A"/>
-                          </a:solidFill>
-                          <a:latin typeface="Arial"/>
-                        </a:defRPr>
-                      </a:pPr>
-                      <a:r>
-                        <a:t>uneven finger separation and awkward contours., Illustrated outlines and smooth</a:t>
-                      </a:r>
-                    </a:p>
-                    <a:p>
-                      <a:pPr>
-                        <a:lnSpc>
-                          <a:spcPts val="1600"/>
-                        </a:lnSpc>
-                        <a:spcAft>
-                          <a:spcPts val="0"/>
-                        </a:spcAft>
-                        <a:defRPr sz="1200" b="0">
-                          <a:solidFill>
-                            <a:srgbClr val="21243A"/>
-                          </a:solidFill>
-                          <a:latin typeface="Arial"/>
-                        </a:defRPr>
-                      </a:pPr>
-                      <a:r>
-                        <a:t>shading throughout; no photographic base is evident.</a:t>
+                        <a:t>synthetic likelihood 78/100; tells: Older woman's gray hair contains tangled,</a:t>
+                      </a:r>
+                    </a:p>
+                    <a:p>
+                      <a:pPr>
+                        <a:lnSpc>
+                          <a:spcPts val="1600"/>
+                        </a:lnSpc>
+                        <a:spcAft>
+                          <a:spcPts val="0"/>
+                        </a:spcAft>
+                        <a:defRPr sz="1200" b="0">
+                          <a:solidFill>
+                            <a:srgbClr val="21243A"/>
+                          </a:solidFill>
+                          <a:latin typeface="Arial"/>
+                        </a:defRPr>
+                      </a:pPr>
+                      <a:r>
+                        <a:t>ribbon-like shapes inconsistent with the other hair rendering., Wheelchair spokes</a:t>
+                      </a:r>
+                    </a:p>
+                    <a:p>
+                      <a:pPr>
+                        <a:lnSpc>
+                          <a:spcPts val="1600"/>
+                        </a:lnSpc>
+                        <a:spcAft>
+                          <a:spcPts val="0"/>
+                        </a:spcAft>
+                        <a:defRPr sz="1200" b="0">
+                          <a:solidFill>
+                            <a:srgbClr val="21243A"/>
+                          </a:solidFill>
+                          <a:latin typeface="Arial"/>
+                        </a:defRPr>
+                      </a:pPr>
+                      <a:r>
+                        <a:t>and lower frame tubes form irregular junctions and ambiguous connections.,</a:t>
+                      </a:r>
+                    </a:p>
+                    <a:p>
+                      <a:pPr>
+                        <a:lnSpc>
+                          <a:spcPts val="1600"/>
+                        </a:lnSpc>
+                        <a:spcAft>
+                          <a:spcPts val="0"/>
+                        </a:spcAft>
+                        <a:defRPr sz="1200" b="0">
+                          <a:solidFill>
+                            <a:srgbClr val="21243A"/>
+                          </a:solidFill>
+                          <a:latin typeface="Arial"/>
+                        </a:defRPr>
+                      </a:pPr>
+                      <a:r>
+                        <a:t>Gesturing hands have uneven finger separation and merged-looking contours.,</a:t>
+                      </a:r>
+                    </a:p>
+                    <a:p>
+                      <a:pPr>
+                        <a:lnSpc>
+                          <a:spcPts val="1600"/>
+                        </a:lnSpc>
+                        <a:spcAft>
+                          <a:spcPts val="0"/>
+                        </a:spcAft>
+                        <a:defRPr sz="1200" b="0">
+                          <a:solidFill>
+                            <a:srgbClr val="21243A"/>
+                          </a:solidFill>
+                          <a:latin typeface="Arial"/>
+                        </a:defRPr>
+                      </a:pPr>
+                      <a:r>
+                        <a:t>Tablet garden has noticeably softer, less defined detail than the surrounding</a:t>
+                      </a:r>
+                    </a:p>
+                    <a:p>
+                      <a:pPr>
+                        <a:lnSpc>
+                          <a:spcPts val="1600"/>
+                        </a:lnSpc>
+                        <a:spcAft>
+                          <a:spcPts val="0"/>
+                        </a:spcAft>
+                        <a:defRPr sz="1200" b="0">
+                          <a:solidFill>
+                            <a:srgbClr val="21243A"/>
+                          </a:solidFill>
+                          <a:latin typeface="Arial"/>
+                        </a:defRPr>
+                      </a:pPr>
+                      <a:r>
+                        <a:t>outlined illustration.</a:t>
                       </a:r>
                     </a:p>
                   </a:txBody>
@@ -11195,7 +11087,7 @@
           <p:nvPr/>
         </p:nvGraphicFramePr>
         <p:xfrm>
-          <a:off x="365760" y="4025392"/>
+          <a:off x="365760" y="4431792"/>
           <a:ext cx="8412479" cy="959103"/>
         </p:xfrm>
         <a:graphic>
@@ -11259,64 +11151,64 @@
                         </a:defRPr>
                       </a:pPr>
                       <a:r>
-                        <a:t>synthetic likelihood 72/100; tells: digital illustration style with hyper-clean lines,</a:t>
-                      </a:r>
-                    </a:p>
-                    <a:p>
-                      <a:pPr>
-                        <a:lnSpc>
-                          <a:spcPts val="1600"/>
-                        </a:lnSpc>
-                        <a:spcAft>
-                          <a:spcPts val="0"/>
-                        </a:spcAft>
-                        <a:defRPr sz="1200" b="0">
-                          <a:solidFill>
-                            <a:srgbClr val="21243A"/>
-                          </a:solidFill>
-                          <a:latin typeface="Arial"/>
-                        </a:defRPr>
-                      </a:pPr>
-                      <a:r>
-                        <a:t>typical diffusion model character rendering features, slight anatomical</a:t>
-                      </a:r>
-                    </a:p>
-                    <a:p>
-                      <a:pPr>
-                        <a:lnSpc>
-                          <a:spcPts val="1600"/>
-                        </a:lnSpc>
-                        <a:spcAft>
-                          <a:spcPts val="0"/>
-                        </a:spcAft>
-                        <a:defRPr sz="1200" b="0">
-                          <a:solidFill>
-                            <a:srgbClr val="21243A"/>
-                          </a:solidFill>
-                          <a:latin typeface="Arial"/>
-                        </a:defRPr>
-                      </a:pPr>
-                      <a:r>
-                        <a:t>inconsistencies in hands and fingers, unusual blending around tablet screen</a:t>
-                      </a:r>
-                    </a:p>
-                    <a:p>
-                      <a:pPr>
-                        <a:lnSpc>
-                          <a:spcPts val="1600"/>
-                        </a:lnSpc>
-                        <a:spcAft>
-                          <a:spcPts val="0"/>
-                        </a:spcAft>
-                        <a:defRPr sz="1200" b="0">
-                          <a:solidFill>
-                            <a:srgbClr val="21243A"/>
-                          </a:solidFill>
-                          <a:latin typeface="Arial"/>
-                        </a:defRPr>
-                      </a:pPr>
-                      <a:r>
-                        <a:t>integration</a:t>
+                        <a:t>synthetic likelihood 72/100; tells: stylized digital line art with subtle AI generative</a:t>
+                      </a:r>
+                    </a:p>
+                    <a:p>
+                      <a:pPr>
+                        <a:lnSpc>
+                          <a:spcPts val="1600"/>
+                        </a:lnSpc>
+                        <a:spcAft>
+                          <a:spcPts val="0"/>
+                        </a:spcAft>
+                        <a:defRPr sz="1200" b="0">
+                          <a:solidFill>
+                            <a:srgbClr val="21243A"/>
+                          </a:solidFill>
+                          <a:latin typeface="Arial"/>
+                        </a:defRPr>
+                      </a:pPr>
+                      <a:r>
+                        <a:t>markers, irregular finger proportions and geometry, overly smooth shading</a:t>
+                      </a:r>
+                    </a:p>
+                    <a:p>
+                      <a:pPr>
+                        <a:lnSpc>
+                          <a:spcPts val="1600"/>
+                        </a:lnSpc>
+                        <a:spcAft>
+                          <a:spcPts val="0"/>
+                        </a:spcAft>
+                        <a:defRPr sz="1200" b="0">
+                          <a:solidFill>
+                            <a:srgbClr val="21243A"/>
+                          </a:solidFill>
+                          <a:latin typeface="Arial"/>
+                        </a:defRPr>
+                      </a:pPr>
+                      <a:r>
+                        <a:t>gradients typical of generative models, inconsistent perspective on wheelchair</a:t>
+                      </a:r>
+                    </a:p>
+                    <a:p>
+                      <a:pPr>
+                        <a:lnSpc>
+                          <a:spcPts val="1600"/>
+                        </a:lnSpc>
+                        <a:spcAft>
+                          <a:spcPts val="0"/>
+                        </a:spcAft>
+                        <a:defRPr sz="1200" b="0">
+                          <a:solidFill>
+                            <a:srgbClr val="21243A"/>
+                          </a:solidFill>
+                          <a:latin typeface="Arial"/>
+                        </a:defRPr>
+                      </a:pPr>
+                      <a:r>
+                        <a:t>spokes</a:t>
                       </a:r>
                     </a:p>
                   </a:txBody>
@@ -12849,7 +12741,7 @@
                         </a:defRPr>
                       </a:pPr>
                       <a:r>
-                        <a:t>e2d54768-0627-4b09-8e9c-bab7b58c211f</a:t>
+                        <a:t>b5b0ad60-55ee-4036-9903-631bccce3d5b</a:t>
                       </a:r>
                     </a:p>
                   </a:txBody>
@@ -12937,7 +12829,7 @@
                         </a:defRPr>
                       </a:pPr>
                       <a:r>
-                        <a:t>2026-09-26T17:54:47+00:00</a:t>
+                        <a:t>2026-09-26T22:31:03+00:00</a:t>
                       </a:r>
                     </a:p>
                   </a:txBody>
@@ -13201,7 +13093,7 @@
                         </a:defRPr>
                       </a:pPr>
                       <a:r>
-                        <a:t>verdict-consistency-2026-09-26.1</a:t>
+                        <a:t>pdf-preparation-2026-09-26.1</a:t>
                       </a:r>
                     </a:p>
                   </a:txBody>
@@ -13402,7 +13294,7 @@
         </p:nvGraphicFramePr>
         <p:xfrm>
           <a:off x="365760" y="4496816"/>
-          <a:ext cx="8412479" cy="1162304"/>
+          <a:ext cx="8412479" cy="552704"/>
         </p:xfrm>
         <a:graphic>
           <a:graphicData uri="http://schemas.openxmlformats.org/drawingml/2006/table">
@@ -13414,7 +13306,7 @@
                 <a:gridCol w="2271369"/>
                 <a:gridCol w="6141110"/>
               </a:tblGrid>
-              <a:tr h="1162304">
+              <a:tr h="552704">
                 <a:tc>
                   <a:txBody>
                     <a:bodyPr wrap="none"/>
@@ -13465,363 +13357,32 @@
                         </a:defRPr>
                       </a:pPr>
                       <a:r>
-                        <a:t>Recomputed locally from the same saved provider replies acquired under run</a:t>
-                      </a:r>
-                    </a:p>
-                    <a:p>
-                      <a:pPr>
-                        <a:lnSpc>
-                          <a:spcPts val="1600"/>
-                        </a:lnSpc>
-                        <a:spcAft>
-                          <a:spcPts val="0"/>
-                        </a:spcAft>
-                        <a:defRPr sz="1200" b="0">
-                          <a:solidFill>
-                            <a:srgbClr val="21243A"/>
-                          </a:solidFill>
-                          <a:latin typeface="Arial"/>
-                        </a:defRPr>
-                      </a:pPr>
-                      <a:r>
-                        <a:t>five-examples-20260926-r1. No new provider requests. Original report</a:t>
-                      </a:r>
-                    </a:p>
-                    <a:p>
-                      <a:pPr>
-                        <a:lnSpc>
-                          <a:spcPts val="1600"/>
-                        </a:lnSpc>
-                        <a:spcAft>
-                          <a:spcPts val="0"/>
-                        </a:spcAft>
-                        <a:defRPr sz="1200" b="0">
-                          <a:solidFill>
-                            <a:srgbClr val="21243A"/>
-                          </a:solidFill>
-                          <a:latin typeface="Arial"/>
-                        </a:defRPr>
-                      </a:pPr>
-                      <a:r>
-                        <a:t>6ed01bd6-3868-4680-ba90-536492d5c7ff was generated at</a:t>
-                      </a:r>
-                    </a:p>
-                    <a:p>
-                      <a:pPr>
-                        <a:lnSpc>
-                          <a:spcPts val="1600"/>
-                        </a:lnSpc>
-                        <a:spcAft>
-                          <a:spcPts val="0"/>
-                        </a:spcAft>
-                        <a:defRPr sz="1200" b="0">
-                          <a:solidFill>
-                            <a:srgbClr val="21243A"/>
-                          </a:solidFill>
-                          <a:latin typeface="Arial"/>
-                        </a:defRPr>
-                      </a:pPr>
-                      <a:r>
-                        <a:t>2026-09-26T17:38:40+00:00 under method publication-repair-2026-09-24.3; that</a:t>
-                      </a:r>
-                    </a:p>
-                    <a:p>
-                      <a:pPr>
-                        <a:lnSpc>
-                          <a:spcPts val="1600"/>
-                        </a:lnSpc>
-                        <a:spcAft>
-                          <a:spcPts val="0"/>
-                        </a:spcAft>
-                        <a:defRPr sz="1200" b="0">
-                          <a:solidFill>
-                            <a:srgbClr val="21243A"/>
-                          </a:solidFill>
-                          <a:latin typeface="Arial"/>
-                        </a:defRPr>
-                      </a:pPr>
-                      <a:r>
-                        <a:t>report is preserved.</a:t>
+                        <a:t>Fresh provider replies acquired for eleven-examples-refresh-20260926-r1; report</a:t>
+                      </a:r>
+                    </a:p>
+                    <a:p>
+                      <a:pPr>
+                        <a:lnSpc>
+                          <a:spcPts val="1600"/>
+                        </a:lnSpc>
+                        <a:spcAft>
+                          <a:spcPts val="0"/>
+                        </a:spcAft>
+                        <a:defRPr sz="1200" b="0">
+                          <a:solidFill>
+                            <a:srgbClr val="21243A"/>
+                          </a:solidFill>
+                          <a:latin typeface="Arial"/>
+                        </a:defRPr>
+                      </a:pPr>
+                      <a:r>
+                        <a:t>assembled locally from the saved responses without further API calls.</a:t>
                       </a:r>
                     </a:p>
                   </a:txBody>
                   <a:tcPr marL="82296" marR="82296" marT="64008" marB="64008">
                     <a:solidFill>
                       <a:srgbClr val="F1F7F7"/>
-                    </a:solidFill>
-                  </a:tcPr>
-                </a:tc>
-              </a:tr>
-            </a:tbl>
-          </a:graphicData>
-        </a:graphic>
-      </p:graphicFrame>
-    </p:spTree>
-  </p:cSld>
-  <p:clrMapOvr>
-    <a:masterClrMapping/>
-  </p:clrMapOvr>
-</p:sld>
-</file>
-
-<file path=ppt/slides/slide18.xml><?xml version="1.0" encoding="utf-8"?>
-<p:sld xmlns:a="http://schemas.openxmlformats.org/drawingml/2006/main" xmlns:p="http://schemas.openxmlformats.org/presentationml/2006/main" xmlns:r="http://schemas.openxmlformats.org/officeDocument/2006/relationships">
-  <p:cSld>
-    <p:spTree>
-      <p:nvGrpSpPr>
-        <p:cNvPr id="1" name=""/>
-        <p:cNvGrpSpPr/>
-        <p:nvPr/>
-      </p:nvGrpSpPr>
-      <p:grpSpPr/>
-      <p:sp>
-        <p:nvSpPr>
-          <p:cNvPr id="2" name="TextBox 1"/>
-          <p:cNvSpPr txBox="1"/>
-          <p:nvPr/>
-        </p:nvSpPr>
-        <p:spPr>
-          <a:xfrm>
-            <a:off x="365760" y="219456"/>
-            <a:ext cx="8412480" cy="228600"/>
-          </a:xfrm>
-          <a:prstGeom prst="rect">
-            <a:avLst/>
-          </a:prstGeom>
-          <a:noFill/>
-        </p:spPr>
-        <p:txBody>
-          <a:bodyPr wrap="square" lIns="0" rIns="0" tIns="0" bIns="0">
-            <a:spAutoFit/>
-          </a:bodyPr>
-          <a:lstStyle/>
-          <a:p>
-            <a:pPr>
-              <a:lnSpc>
-                <a:spcPct val="115000"/>
-              </a:lnSpc>
-              <a:spcAft>
-                <a:spcPts val="0"/>
-              </a:spcAft>
-              <a:defRPr sz="1100" b="1">
-                <a:solidFill>
-                  <a:srgbClr val="C5006A"/>
-                </a:solidFill>
-                <a:latin typeface="Arial"/>
-              </a:defRPr>
-            </a:pPr>
-            <a:r>
-              <a:t>SDA VISION / RESEARCH REPORT</a:t>
-            </a:r>
-          </a:p>
-        </p:txBody>
-      </p:sp>
-      <p:sp>
-        <p:nvSpPr>
-          <p:cNvPr id="3" name="TextBox 2"/>
-          <p:cNvSpPr txBox="1"/>
-          <p:nvPr/>
-        </p:nvSpPr>
-        <p:spPr>
-          <a:xfrm>
-            <a:off x="365760" y="658368"/>
-            <a:ext cx="8412480" cy="612648"/>
-          </a:xfrm>
-          <a:prstGeom prst="rect">
-            <a:avLst/>
-          </a:prstGeom>
-          <a:noFill/>
-        </p:spPr>
-        <p:txBody>
-          <a:bodyPr wrap="square" lIns="0" rIns="0" tIns="0" bIns="0">
-            <a:spAutoFit/>
-          </a:bodyPr>
-          <a:lstStyle/>
-          <a:p>
-            <a:pPr>
-              <a:lnSpc>
-                <a:spcPct val="115000"/>
-              </a:lnSpc>
-              <a:spcAft>
-                <a:spcPts val="0"/>
-              </a:spcAft>
-              <a:defRPr sz="2200" b="1">
-                <a:solidFill>
-                  <a:srgbClr val="21243A"/>
-                </a:solidFill>
-                <a:latin typeface="Arial"/>
-              </a:defRPr>
-            </a:pPr>
-            <a:r>
-              <a:t>File and analysis record (continued)</a:t>
-            </a:r>
-          </a:p>
-        </p:txBody>
-      </p:sp>
-      <p:sp>
-        <p:nvSpPr>
-          <p:cNvPr id="4" name="TextBox 3"/>
-          <p:cNvSpPr txBox="1"/>
-          <p:nvPr/>
-        </p:nvSpPr>
-        <p:spPr>
-          <a:xfrm>
-            <a:off x="365760" y="6291072"/>
-            <a:ext cx="8001000" cy="365760"/>
-          </a:xfrm>
-          <a:prstGeom prst="rect">
-            <a:avLst/>
-          </a:prstGeom>
-          <a:noFill/>
-        </p:spPr>
-        <p:txBody>
-          <a:bodyPr wrap="square" lIns="0" rIns="0" tIns="0" bIns="0">
-            <a:spAutoFit/>
-          </a:bodyPr>
-          <a:lstStyle/>
-          <a:p>
-            <a:pPr>
-              <a:lnSpc>
-                <a:spcPct val="115000"/>
-              </a:lnSpc>
-              <a:spcAft>
-                <a:spcPts val="0"/>
-              </a:spcAft>
-              <a:defRPr sz="800" b="0">
-                <a:solidFill>
-                  <a:srgbClr val="545B6D"/>
-                </a:solidFill>
-                <a:latin typeface="Arial"/>
-              </a:defRPr>
-            </a:pPr>
-            <a:r>
-              <a:t>Research assessment. Ratings are not calibrated probabilities.</a:t>
-            </a:r>
-          </a:p>
-        </p:txBody>
-      </p:sp>
-      <p:sp>
-        <p:nvSpPr>
-          <p:cNvPr id="5" name="TextBox 4"/>
-          <p:cNvSpPr txBox="1"/>
-          <p:nvPr/>
-        </p:nvSpPr>
-        <p:spPr>
-          <a:xfrm>
-            <a:off x="8394192" y="6318504"/>
-            <a:ext cx="365760" cy="228600"/>
-          </a:xfrm>
-          <a:prstGeom prst="rect">
-            <a:avLst/>
-          </a:prstGeom>
-          <a:noFill/>
-        </p:spPr>
-        <p:txBody>
-          <a:bodyPr wrap="square" lIns="0" rIns="0" tIns="0" bIns="0">
-            <a:spAutoFit/>
-          </a:bodyPr>
-          <a:lstStyle/>
-          <a:p>
-            <a:pPr>
-              <a:lnSpc>
-                <a:spcPct val="115000"/>
-              </a:lnSpc>
-              <a:spcAft>
-                <a:spcPts val="0"/>
-              </a:spcAft>
-              <a:defRPr sz="900" b="0">
-                <a:solidFill>
-                  <a:srgbClr val="545B6D"/>
-                </a:solidFill>
-                <a:latin typeface="Arial"/>
-              </a:defRPr>
-            </a:pPr>
-            <a:r>
-              <a:t>18</a:t>
-            </a:r>
-          </a:p>
-        </p:txBody>
-      </p:sp>
-      <p:graphicFrame>
-        <p:nvGraphicFramePr>
-          <p:cNvPr id="6" name="Table 5"/>
-          <p:cNvGraphicFramePr>
-            <a:graphicFrameLocks noGrp="1"/>
-          </p:cNvGraphicFramePr>
-          <p:nvPr/>
-        </p:nvGraphicFramePr>
-        <p:xfrm>
-          <a:off x="365760" y="1353312"/>
-          <a:ext cx="8412479" cy="347472"/>
-        </p:xfrm>
-        <a:graphic>
-          <a:graphicData uri="http://schemas.openxmlformats.org/drawingml/2006/table">
-            <a:tbl>
-              <a:tblPr firstRow="1" bandRow="1">
-                <a:tableStyleId>{5C22544A-7EE6-4342-B048-85BDC9FD1C3A}</a:tableStyleId>
-              </a:tblPr>
-              <a:tblGrid>
-                <a:gridCol w="2271369"/>
-                <a:gridCol w="6141110"/>
-              </a:tblGrid>
-              <a:tr h="347472">
-                <a:tc>
-                  <a:txBody>
-                    <a:bodyPr wrap="none"/>
-                    <a:lstStyle/>
-                    <a:p>
-                      <a:pPr>
-                        <a:lnSpc>
-                          <a:spcPts val="1600"/>
-                        </a:lnSpc>
-                        <a:spcAft>
-                          <a:spcPts val="0"/>
-                        </a:spcAft>
-                        <a:defRPr sz="1200" b="1">
-                          <a:solidFill>
-                            <a:srgbClr val="FFFFFF"/>
-                          </a:solidFill>
-                          <a:latin typeface="Arial"/>
-                        </a:defRPr>
-                      </a:pPr>
-                      <a:r>
-                        <a:t>Field</a:t>
-                      </a:r>
-                    </a:p>
-                  </a:txBody>
-                  <a:tcPr marL="82296" marR="82296" marT="64008" marB="64008">
-                    <a:solidFill>
-                      <a:srgbClr val="16787C"/>
-                    </a:solidFill>
-                  </a:tcPr>
-                </a:tc>
-                <a:tc>
-                  <a:txBody>
-                    <a:bodyPr wrap="none"/>
-                    <a:lstStyle/>
-                    <a:p>
-                      <a:pPr>
-                        <a:lnSpc>
-                          <a:spcPts val="1600"/>
-                        </a:lnSpc>
-                        <a:spcAft>
-                          <a:spcPts val="0"/>
-                        </a:spcAft>
-                        <a:defRPr sz="1200" b="1">
-                          <a:solidFill>
-                            <a:srgbClr val="FFFFFF"/>
-                          </a:solidFill>
-                          <a:latin typeface="Arial"/>
-                        </a:defRPr>
-                      </a:pPr>
-                      <a:r>
-                        <a:t>Recorded detail</a:t>
-                      </a:r>
-                    </a:p>
-                  </a:txBody>
-                  <a:tcPr marL="82296" marR="82296" marT="64008" marB="64008">
-                    <a:solidFill>
-                      <a:srgbClr val="16787C"/>
                     </a:solidFill>
                   </a:tcPr>
                 </a:tc>
@@ -13832,14 +13393,14 @@
       </p:graphicFrame>
       <p:graphicFrame>
         <p:nvGraphicFramePr>
-          <p:cNvPr id="7" name="Table 6"/>
+          <p:cNvPr id="16" name="Table 15"/>
           <p:cNvGraphicFramePr>
             <a:graphicFrameLocks noGrp="1"/>
           </p:cNvGraphicFramePr>
           <p:nvPr/>
         </p:nvGraphicFramePr>
         <p:xfrm>
-          <a:off x="365760" y="1700784"/>
+          <a:off x="365760" y="5049520"/>
           <a:ext cx="8412479" cy="755904"/>
         </p:xfrm>
         <a:graphic>
@@ -13903,196 +13464,51 @@
                         </a:defRPr>
                       </a:pPr>
                       <a:r>
-                        <a:t>Method verdict-consistency-2026-09-26.1: directional model votes require</a:t>
-                      </a:r>
-                    </a:p>
-                    <a:p>
-                      <a:pPr>
-                        <a:lnSpc>
-                          <a:spcPts val="1600"/>
-                        </a:lnSpc>
-                        <a:spcAft>
-                          <a:spcPts val="0"/>
-                        </a:spcAft>
-                        <a:defRPr sz="1200" b="0">
-                          <a:solidFill>
-                            <a:srgbClr val="21243A"/>
-                          </a:solidFill>
-                          <a:latin typeface="Arial"/>
-                        </a:defRPr>
-                      </a:pPr>
-                      <a:r>
-                        <a:t>matching explicit verdicts and rating thresholds. Inconclusive replies retain their</a:t>
-                      </a:r>
-                    </a:p>
-                    <a:p>
-                      <a:pPr>
-                        <a:lnSpc>
-                          <a:spcPts val="1600"/>
-                        </a:lnSpc>
-                        <a:spcAft>
-                          <a:spcPts val="0"/>
-                        </a:spcAft>
-                        <a:defRPr sz="1200" b="0">
-                          <a:solidFill>
-                            <a:srgbClr val="21243A"/>
-                          </a:solidFill>
-                          <a:latin typeface="Arial"/>
-                        </a:defRPr>
-                      </a:pPr>
-                      <a:r>
-                        <a:t>ratings and remain undecided observations.</a:t>
+                        <a:t>Provider latency values are restored from the acquisition receipts (maximum</a:t>
+                      </a:r>
+                    </a:p>
+                    <a:p>
+                      <a:pPr>
+                        <a:lnSpc>
+                          <a:spcPts val="1600"/>
+                        </a:lnSpc>
+                        <a:spcAft>
+                          <a:spcPts val="0"/>
+                        </a:spcAft>
+                        <a:defRPr sz="1200" b="0">
+                          <a:solidFill>
+                            <a:srgbClr val="21243A"/>
+                          </a:solidFill>
+                          <a:latin typeface="Arial"/>
+                        </a:defRPr>
+                      </a:pPr>
+                      <a:r>
+                        <a:t>sampled-frame latency per provider); raw replies and assessment results are</a:t>
+                      </a:r>
+                    </a:p>
+                    <a:p>
+                      <a:pPr>
+                        <a:lnSpc>
+                          <a:spcPts val="1600"/>
+                        </a:lnSpc>
+                        <a:spcAft>
+                          <a:spcPts val="0"/>
+                        </a:spcAft>
+                        <a:defRPr sz="1200" b="0">
+                          <a:solidFill>
+                            <a:srgbClr val="21243A"/>
+                          </a:solidFill>
+                          <a:latin typeface="Arial"/>
+                        </a:defRPr>
+                      </a:pPr>
+                      <a:r>
+                        <a:t>unchanged by this bookkeeping step.</a:t>
                       </a:r>
                     </a:p>
                   </a:txBody>
                   <a:tcPr marL="82296" marR="82296" marT="64008" marB="64008">
                     <a:solidFill>
                       <a:srgbClr val="FFFFFF"/>
-                    </a:solidFill>
-                  </a:tcPr>
-                </a:tc>
-              </a:tr>
-            </a:tbl>
-          </a:graphicData>
-        </a:graphic>
-      </p:graphicFrame>
-      <p:graphicFrame>
-        <p:nvGraphicFramePr>
-          <p:cNvPr id="8" name="Table 7"/>
-          <p:cNvGraphicFramePr>
-            <a:graphicFrameLocks noGrp="1"/>
-          </p:cNvGraphicFramePr>
-          <p:nvPr/>
-        </p:nvGraphicFramePr>
-        <p:xfrm>
-          <a:off x="365760" y="2456688"/>
-          <a:ext cx="8412479" cy="959103"/>
-        </p:xfrm>
-        <a:graphic>
-          <a:graphicData uri="http://schemas.openxmlformats.org/drawingml/2006/table">
-            <a:tbl>
-              <a:tblPr firstRow="1" bandRow="1">
-                <a:tableStyleId>{5C22544A-7EE6-4342-B048-85BDC9FD1C3A}</a:tableStyleId>
-              </a:tblPr>
-              <a:tblGrid>
-                <a:gridCol w="2271369"/>
-                <a:gridCol w="6141110"/>
-              </a:tblGrid>
-              <a:tr h="959103">
-                <a:tc>
-                  <a:txBody>
-                    <a:bodyPr wrap="none"/>
-                    <a:lstStyle/>
-                    <a:p>
-                      <a:pPr>
-                        <a:lnSpc>
-                          <a:spcPts val="1600"/>
-                        </a:lnSpc>
-                        <a:spcAft>
-                          <a:spcPts val="0"/>
-                        </a:spcAft>
-                        <a:defRPr sz="1200" b="0">
-                          <a:solidFill>
-                            <a:srgbClr val="21243A"/>
-                          </a:solidFill>
-                          <a:latin typeface="Arial"/>
-                        </a:defRPr>
-                      </a:pPr>
-                      <a:r>
-                        <a:t>Ingestion note 3</a:t>
-                      </a:r>
-                    </a:p>
-                  </a:txBody>
-                  <a:tcPr marL="82296" marR="82296" marT="64008" marB="64008">
-                    <a:solidFill>
-                      <a:srgbClr val="F1F7F7"/>
-                    </a:solidFill>
-                  </a:tcPr>
-                </a:tc>
-                <a:tc>
-                  <a:txBody>
-                    <a:bodyPr wrap="none"/>
-                    <a:lstStyle/>
-                    <a:p>
-                      <a:pPr>
-                        <a:lnSpc>
-                          <a:spcPts val="1600"/>
-                        </a:lnSpc>
-                        <a:spcAft>
-                          <a:spcPts val="0"/>
-                        </a:spcAft>
-                        <a:defRPr sz="1200" b="0">
-                          <a:solidFill>
-                            <a:srgbClr val="21243A"/>
-                          </a:solidFill>
-                          <a:latin typeface="Arial"/>
-                        </a:defRPr>
-                      </a:pPr>
-                      <a:r>
-                        <a:t>Presentation copy of saved report 6faeca61-589d-4810-8b3a-aec00dfb18e5. The</a:t>
-                      </a:r>
-                    </a:p>
-                    <a:p>
-                      <a:pPr>
-                        <a:lnSpc>
-                          <a:spcPts val="1600"/>
-                        </a:lnSpc>
-                        <a:spcAft>
-                          <a:spcPts val="0"/>
-                        </a:spcAft>
-                        <a:defRPr sz="1200" b="0">
-                          <a:solidFill>
-                            <a:srgbClr val="21243A"/>
-                          </a:solidFill>
-                          <a:latin typeface="Arial"/>
-                        </a:defRPr>
-                      </a:pPr>
-                      <a:r>
-                        <a:t>descriptive filename replaces the earlier example ID for navigation. Original</a:t>
-                      </a:r>
-                    </a:p>
-                    <a:p>
-                      <a:pPr>
-                        <a:lnSpc>
-                          <a:spcPts val="1600"/>
-                        </a:lnSpc>
-                        <a:spcAft>
-                          <a:spcPts val="0"/>
-                        </a:spcAft>
-                        <a:defRPr sz="1200" b="0">
-                          <a:solidFill>
-                            <a:srgbClr val="21243A"/>
-                          </a:solidFill>
-                          <a:latin typeface="Arial"/>
-                        </a:defRPr>
-                      </a:pPr>
-                      <a:r>
-                        <a:t>analysis dates, provider replies, scores and acquisition context are retained; no</a:t>
-                      </a:r>
-                    </a:p>
-                    <a:p>
-                      <a:pPr>
-                        <a:lnSpc>
-                          <a:spcPts val="1600"/>
-                        </a:lnSpc>
-                        <a:spcAft>
-                          <a:spcPts val="0"/>
-                        </a:spcAft>
-                        <a:defRPr sz="1200" b="0">
-                          <a:solidFill>
-                            <a:srgbClr val="21243A"/>
-                          </a:solidFill>
-                          <a:latin typeface="Arial"/>
-                        </a:defRPr>
-                      </a:pPr>
-                      <a:r>
-                        <a:t>new model analysis.</a:t>
-                      </a:r>
-                    </a:p>
-                  </a:txBody>
-                  <a:tcPr marL="82296" marR="82296" marT="64008" marB="64008">
-                    <a:solidFill>
-                      <a:srgbClr val="F1F7F7"/>
                     </a:solidFill>
                   </a:tcPr>
                 </a:tc>
@@ -15588,7 +15004,7 @@
                         </a:defRPr>
                       </a:pPr>
                       <a:r>
-                        <a:t>85/100</a:t>
+                        <a:t>82/100</a:t>
                       </a:r>
                     </a:p>
                   </a:txBody>
@@ -17015,7 +16431,7 @@
         </p:nvGraphicFramePr>
         <p:xfrm>
           <a:off x="365760" y="3797808"/>
-          <a:ext cx="8412479" cy="1162304"/>
+          <a:ext cx="8412479" cy="1365503"/>
         </p:xfrm>
         <a:graphic>
           <a:graphicData uri="http://schemas.openxmlformats.org/drawingml/2006/table">
@@ -17027,7 +16443,7 @@
                 <a:gridCol w="2271369"/>
                 <a:gridCol w="6141110"/>
               </a:tblGrid>
-              <a:tr h="1162304">
+              <a:tr h="1365503">
                 <a:tc>
                   <a:txBody>
                     <a:bodyPr wrap="none"/>
@@ -17078,83 +16494,102 @@
                         </a:defRPr>
                       </a:pPr>
                       <a:r>
-                        <a:t>synthetic likelihood 85/100; tells: uniform digital-illustration style with inked</a:t>
-                      </a:r>
-                    </a:p>
-                    <a:p>
-                      <a:pPr>
-                        <a:lnSpc>
-                          <a:spcPts val="1600"/>
-                        </a:lnSpc>
-                        <a:spcAft>
-                          <a:spcPts val="0"/>
-                        </a:spcAft>
-                        <a:defRPr sz="1200" b="0">
-                          <a:solidFill>
-                            <a:srgbClr val="21243A"/>
-                          </a:solidFill>
-                          <a:latin typeface="Arial"/>
-                        </a:defRPr>
-                      </a:pPr>
-                      <a:r>
-                        <a:t>outlines and painterly shading typical of current image generators, over-regular</a:t>
-                      </a:r>
-                    </a:p>
-                    <a:p>
-                      <a:pPr>
-                        <a:lnSpc>
-                          <a:spcPts val="1600"/>
-                        </a:lnSpc>
-                        <a:spcAft>
-                          <a:spcPts val="0"/>
-                        </a:spcAft>
-                        <a:defRPr sz="1200" b="0">
-                          <a:solidFill>
-                            <a:srgbClr val="21243A"/>
-                          </a:solidFill>
-                          <a:latin typeface="Arial"/>
-                        </a:defRPr>
-                      </a:pPr>
-                      <a:r>
-                        <a:t>stippled texture in grey curly hair, wheelchair spoke and frame geometry</a:t>
-                      </a:r>
-                    </a:p>
-                    <a:p>
-                      <a:pPr>
-                        <a:lnSpc>
-                          <a:spcPts val="1600"/>
-                        </a:lnSpc>
-                        <a:spcAft>
-                          <a:spcPts val="0"/>
-                        </a:spcAft>
-                        <a:defRPr sz="1200" b="0">
-                          <a:solidFill>
-                            <a:srgbClr val="21243A"/>
-                          </a:solidFill>
-                          <a:latin typeface="Arial"/>
-                        </a:defRPr>
-                      </a:pPr>
-                      <a:r>
-                        <a:t>inconsistent between wheels, with spokes merging and fading, tablet screen</a:t>
-                      </a:r>
-                    </a:p>
-                    <a:p>
-                      <a:pPr>
-                        <a:lnSpc>
-                          <a:spcPts val="1600"/>
-                        </a:lnSpc>
-                        <a:spcAft>
-                          <a:spcPts val="0"/>
-                        </a:spcAft>
-                        <a:defRPr sz="1200" b="0">
-                          <a:solidFill>
-                            <a:srgbClr val="21243A"/>
-                          </a:solidFill>
-                          <a:latin typeface="Arial"/>
-                        </a:defRPr>
-                      </a:pPr>
-                      <a:r>
-                        <a:t>shows a generic, softly detailed garden scene with no UI elements</a:t>
+                        <a:t>synthetic likelihood 82/100; tells: not a camera photo: digital illustration in a</a:t>
+                      </a:r>
+                    </a:p>
+                    <a:p>
+                      <a:pPr>
+                        <a:lnSpc>
+                          <a:spcPts val="1600"/>
+                        </a:lnSpc>
+                        <a:spcAft>
+                          <a:spcPts val="0"/>
+                        </a:spcAft>
+                        <a:defRPr sz="1200" b="0">
+                          <a:solidFill>
+                            <a:srgbClr val="21243A"/>
+                          </a:solidFill>
+                          <a:latin typeface="Arial"/>
+                        </a:defRPr>
+                      </a:pPr>
+                      <a:r>
+                        <a:t>uniform, polished comic/ink-and-colour style typical of current image generators,</a:t>
+                      </a:r>
+                    </a:p>
+                    <a:p>
+                      <a:pPr>
+                        <a:lnSpc>
+                          <a:spcPts val="1600"/>
+                        </a:lnSpc>
+                        <a:spcAft>
+                          <a:spcPts val="0"/>
+                        </a:spcAft>
+                        <a:defRPr sz="1200" b="0">
+                          <a:solidFill>
+                            <a:srgbClr val="21243A"/>
+                          </a:solidFill>
+                          <a:latin typeface="Arial"/>
+                        </a:defRPr>
+                      </a:pPr>
+                      <a:r>
+                        <a:t>hyper-consistent line weight and cel shading across all figures with no stroke</a:t>
+                      </a:r>
+                    </a:p>
+                    <a:p>
+                      <a:pPr>
+                        <a:lnSpc>
+                          <a:spcPts val="1600"/>
+                        </a:lnSpc>
+                        <a:spcAft>
+                          <a:spcPts val="0"/>
+                        </a:spcAft>
+                        <a:defRPr sz="1200" b="0">
+                          <a:solidFill>
+                            <a:srgbClr val="21243A"/>
+                          </a:solidFill>
+                          <a:latin typeface="Arial"/>
+                        </a:defRPr>
+                      </a:pPr>
+                      <a:r>
+                        <a:t>variation or construction marks, noisy, fragmented texture in the grey curly hair,</a:t>
+                      </a:r>
+                    </a:p>
+                    <a:p>
+                      <a:pPr>
+                        <a:lnSpc>
+                          <a:spcPts val="1600"/>
+                        </a:lnSpc>
+                        <a:spcAft>
+                          <a:spcPts val="0"/>
+                        </a:spcAft>
+                        <a:defRPr sz="1200" b="0">
+                          <a:solidFill>
+                            <a:srgbClr val="21243A"/>
+                          </a:solidFill>
+                          <a:latin typeface="Arial"/>
+                        </a:defRPr>
+                      </a:pPr>
+                      <a:r>
+                        <a:t>resembling generator detail artifacts rather than deliberate strokes, tablet screen</a:t>
+                      </a:r>
+                    </a:p>
+                    <a:p>
+                      <a:pPr>
+                        <a:lnSpc>
+                          <a:spcPts val="1600"/>
+                        </a:lnSpc>
+                        <a:spcAft>
+                          <a:spcPts val="0"/>
+                        </a:spcAft>
+                        <a:defRPr sz="1200" b="0">
+                          <a:solidFill>
+                            <a:srgbClr val="21243A"/>
+                          </a:solidFill>
+                          <a:latin typeface="Arial"/>
+                        </a:defRPr>
+                      </a:pPr>
+                      <a:r>
+                        <a:t>shows an indistinct garden/playground scene with smeared, non-specific detail</a:t>
                       </a:r>
                     </a:p>
                   </a:txBody>
@@ -17178,7 +16613,7 @@
           <p:nvPr/>
         </p:nvGraphicFramePr>
         <p:xfrm>
-          <a:off x="365760" y="4960112"/>
+          <a:off x="365760" y="5163312"/>
           <a:ext cx="8412479" cy="552704"/>
         </p:xfrm>
         <a:graphic>
@@ -17242,120 +16677,32 @@
                         </a:defRPr>
                       </a:pPr>
                       <a:r>
-                        <a:t>Uniform digital-illustration style with inked outlines and painterly shading typical</a:t>
-                      </a:r>
-                    </a:p>
-                    <a:p>
-                      <a:pPr>
-                        <a:lnSpc>
-                          <a:spcPts val="1600"/>
-                        </a:lnSpc>
-                        <a:spcAft>
-                          <a:spcPts val="0"/>
-                        </a:spcAft>
-                        <a:defRPr sz="1200" b="0">
-                          <a:solidFill>
-                            <a:srgbClr val="21243A"/>
-                          </a:solidFill>
-                          <a:latin typeface="Arial"/>
-                        </a:defRPr>
-                      </a:pPr>
-                      <a:r>
-                        <a:t>of current image generators</a:t>
+                        <a:t>Not a camera photo: digital illustration in a uniform, polished</a:t>
+                      </a:r>
+                    </a:p>
+                    <a:p>
+                      <a:pPr>
+                        <a:lnSpc>
+                          <a:spcPts val="1600"/>
+                        </a:lnSpc>
+                        <a:spcAft>
+                          <a:spcPts val="0"/>
+                        </a:spcAft>
+                        <a:defRPr sz="1200" b="0">
+                          <a:solidFill>
+                            <a:srgbClr val="21243A"/>
+                          </a:solidFill>
+                          <a:latin typeface="Arial"/>
+                        </a:defRPr>
+                      </a:pPr>
+                      <a:r>
+                        <a:t>comic/ink-and-colour style typical of current image generators</a:t>
                       </a:r>
                     </a:p>
                   </a:txBody>
                   <a:tcPr marL="82296" marR="82296" marT="64008" marB="64008">
                     <a:solidFill>
                       <a:srgbClr val="FFFFFF"/>
-                    </a:solidFill>
-                  </a:tcPr>
-                </a:tc>
-              </a:tr>
-            </a:tbl>
-          </a:graphicData>
-        </a:graphic>
-      </p:graphicFrame>
-      <p:graphicFrame>
-        <p:nvGraphicFramePr>
-          <p:cNvPr id="15" name="Table 14"/>
-          <p:cNvGraphicFramePr>
-            <a:graphicFrameLocks noGrp="1"/>
-          </p:cNvGraphicFramePr>
-          <p:nvPr/>
-        </p:nvGraphicFramePr>
-        <p:xfrm>
-          <a:off x="365760" y="5512816"/>
-          <a:ext cx="8412479" cy="349504"/>
-        </p:xfrm>
-        <a:graphic>
-          <a:graphicData uri="http://schemas.openxmlformats.org/drawingml/2006/table">
-            <a:tbl>
-              <a:tblPr firstRow="1" bandRow="1">
-                <a:tableStyleId>{5C22544A-7EE6-4342-B048-85BDC9FD1C3A}</a:tableStyleId>
-              </a:tblPr>
-              <a:tblGrid>
-                <a:gridCol w="2271369"/>
-                <a:gridCol w="6141110"/>
-              </a:tblGrid>
-              <a:tr h="349504">
-                <a:tc>
-                  <a:txBody>
-                    <a:bodyPr wrap="none"/>
-                    <a:lstStyle/>
-                    <a:p>
-                      <a:pPr>
-                        <a:lnSpc>
-                          <a:spcPts val="1600"/>
-                        </a:lnSpc>
-                        <a:spcAft>
-                          <a:spcPts val="0"/>
-                        </a:spcAft>
-                        <a:defRPr sz="1200" b="0">
-                          <a:solidFill>
-                            <a:srgbClr val="21243A"/>
-                          </a:solidFill>
-                          <a:latin typeface="Arial"/>
-                        </a:defRPr>
-                      </a:pPr>
-                      <a:r>
-                        <a:t>Evidence 2</a:t>
-                      </a:r>
-                    </a:p>
-                  </a:txBody>
-                  <a:tcPr marL="82296" marR="82296" marT="64008" marB="64008">
-                    <a:solidFill>
-                      <a:srgbClr val="F1F7F7"/>
-                    </a:solidFill>
-                  </a:tcPr>
-                </a:tc>
-                <a:tc>
-                  <a:txBody>
-                    <a:bodyPr wrap="none"/>
-                    <a:lstStyle/>
-                    <a:p>
-                      <a:pPr>
-                        <a:lnSpc>
-                          <a:spcPts val="1600"/>
-                        </a:lnSpc>
-                        <a:spcAft>
-                          <a:spcPts val="0"/>
-                        </a:spcAft>
-                        <a:defRPr sz="1200" b="0">
-                          <a:solidFill>
-                            <a:srgbClr val="21243A"/>
-                          </a:solidFill>
-                          <a:latin typeface="Arial"/>
-                        </a:defRPr>
-                      </a:pPr>
-                      <a:r>
-                        <a:t>Over-regular stippled texture in grey curly hair</a:t>
-                      </a:r>
-                    </a:p>
-                  </a:txBody>
-                  <a:tcPr marL="82296" marR="82296" marT="64008" marB="64008">
-                    <a:solidFill>
-                      <a:srgbClr val="F1F7F7"/>
                     </a:solidFill>
                   </a:tcPr>
                 </a:tc>
@@ -17681,62 +17028,62 @@
                         </a:defRPr>
                       </a:pPr>
                       <a:r>
-                        <a:t>Evidence 3</a:t>
-                      </a:r>
-                    </a:p>
-                  </a:txBody>
-                  <a:tcPr marL="82296" marR="82296" marT="64008" marB="64008">
-                    <a:solidFill>
-                      <a:srgbClr val="FFFFFF"/>
-                    </a:solidFill>
-                  </a:tcPr>
-                </a:tc>
-                <a:tc>
-                  <a:txBody>
-                    <a:bodyPr wrap="none"/>
-                    <a:lstStyle/>
-                    <a:p>
-                      <a:pPr>
-                        <a:lnSpc>
-                          <a:spcPts val="1600"/>
-                        </a:lnSpc>
-                        <a:spcAft>
-                          <a:spcPts val="0"/>
-                        </a:spcAft>
-                        <a:defRPr sz="1200" b="0">
-                          <a:solidFill>
-                            <a:srgbClr val="21243A"/>
-                          </a:solidFill>
-                          <a:latin typeface="Arial"/>
-                        </a:defRPr>
-                      </a:pPr>
-                      <a:r>
-                        <a:t>Wheelchair spoke and frame geometry inconsistent between wheels, with spokes</a:t>
-                      </a:r>
-                    </a:p>
-                    <a:p>
-                      <a:pPr>
-                        <a:lnSpc>
-                          <a:spcPts val="1600"/>
-                        </a:lnSpc>
-                        <a:spcAft>
-                          <a:spcPts val="0"/>
-                        </a:spcAft>
-                        <a:defRPr sz="1200" b="0">
-                          <a:solidFill>
-                            <a:srgbClr val="21243A"/>
-                          </a:solidFill>
-                          <a:latin typeface="Arial"/>
-                        </a:defRPr>
-                      </a:pPr>
-                      <a:r>
-                        <a:t>merging and fading</a:t>
-                      </a:r>
-                    </a:p>
-                  </a:txBody>
-                  <a:tcPr marL="82296" marR="82296" marT="64008" marB="64008">
-                    <a:solidFill>
-                      <a:srgbClr val="FFFFFF"/>
+                        <a:t>Evidence 2</a:t>
+                      </a:r>
+                    </a:p>
+                  </a:txBody>
+                  <a:tcPr marL="82296" marR="82296" marT="64008" marB="64008">
+                    <a:solidFill>
+                      <a:srgbClr val="F1F7F7"/>
+                    </a:solidFill>
+                  </a:tcPr>
+                </a:tc>
+                <a:tc>
+                  <a:txBody>
+                    <a:bodyPr wrap="none"/>
+                    <a:lstStyle/>
+                    <a:p>
+                      <a:pPr>
+                        <a:lnSpc>
+                          <a:spcPts val="1600"/>
+                        </a:lnSpc>
+                        <a:spcAft>
+                          <a:spcPts val="0"/>
+                        </a:spcAft>
+                        <a:defRPr sz="1200" b="0">
+                          <a:solidFill>
+                            <a:srgbClr val="21243A"/>
+                          </a:solidFill>
+                          <a:latin typeface="Arial"/>
+                        </a:defRPr>
+                      </a:pPr>
+                      <a:r>
+                        <a:t>Hyper-consistent line weight and cel shading across all figures with no stroke</a:t>
+                      </a:r>
+                    </a:p>
+                    <a:p>
+                      <a:pPr>
+                        <a:lnSpc>
+                          <a:spcPts val="1600"/>
+                        </a:lnSpc>
+                        <a:spcAft>
+                          <a:spcPts val="0"/>
+                        </a:spcAft>
+                        <a:defRPr sz="1200" b="0">
+                          <a:solidFill>
+                            <a:srgbClr val="21243A"/>
+                          </a:solidFill>
+                          <a:latin typeface="Arial"/>
+                        </a:defRPr>
+                      </a:pPr>
+                      <a:r>
+                        <a:t>variation or construction marks</a:t>
+                      </a:r>
+                    </a:p>
+                  </a:txBody>
+                  <a:tcPr marL="82296" marR="82296" marT="64008" marB="64008">
+                    <a:solidFill>
+                      <a:srgbClr val="F1F7F7"/>
                     </a:solidFill>
                   </a:tcPr>
                 </a:tc>
@@ -17755,7 +17102,7 @@
         </p:nvGraphicFramePr>
         <p:xfrm>
           <a:off x="365760" y="2253488"/>
-          <a:ext cx="8412479" cy="349504"/>
+          <a:ext cx="8412479" cy="552704"/>
         </p:xfrm>
         <a:graphic>
           <a:graphicData uri="http://schemas.openxmlformats.org/drawingml/2006/table">
@@ -17767,64 +17114,83 @@
                 <a:gridCol w="2271369"/>
                 <a:gridCol w="6141110"/>
               </a:tblGrid>
-              <a:tr h="349504">
-                <a:tc>
-                  <a:txBody>
-                    <a:bodyPr wrap="none"/>
-                    <a:lstStyle/>
-                    <a:p>
-                      <a:pPr>
-                        <a:lnSpc>
-                          <a:spcPts val="1600"/>
-                        </a:lnSpc>
-                        <a:spcAft>
-                          <a:spcPts val="0"/>
-                        </a:spcAft>
-                        <a:defRPr sz="1200" b="0">
-                          <a:solidFill>
-                            <a:srgbClr val="21243A"/>
-                          </a:solidFill>
-                          <a:latin typeface="Arial"/>
-                        </a:defRPr>
-                      </a:pPr>
-                      <a:r>
-                        <a:t>Evidence 4</a:t>
-                      </a:r>
-                    </a:p>
-                  </a:txBody>
-                  <a:tcPr marL="82296" marR="82296" marT="64008" marB="64008">
-                    <a:solidFill>
-                      <a:srgbClr val="F1F7F7"/>
-                    </a:solidFill>
-                  </a:tcPr>
-                </a:tc>
-                <a:tc>
-                  <a:txBody>
-                    <a:bodyPr wrap="none"/>
-                    <a:lstStyle/>
-                    <a:p>
-                      <a:pPr>
-                        <a:lnSpc>
-                          <a:spcPts val="1600"/>
-                        </a:lnSpc>
-                        <a:spcAft>
-                          <a:spcPts val="0"/>
-                        </a:spcAft>
-                        <a:defRPr sz="1200" b="0">
-                          <a:solidFill>
-                            <a:srgbClr val="21243A"/>
-                          </a:solidFill>
-                          <a:latin typeface="Arial"/>
-                        </a:defRPr>
-                      </a:pPr>
-                      <a:r>
-                        <a:t>Tablet screen shows a generic, softly detailed garden scene with no UI elements</a:t>
-                      </a:r>
-                    </a:p>
-                  </a:txBody>
-                  <a:tcPr marL="82296" marR="82296" marT="64008" marB="64008">
-                    <a:solidFill>
-                      <a:srgbClr val="F1F7F7"/>
+              <a:tr h="552704">
+                <a:tc>
+                  <a:txBody>
+                    <a:bodyPr wrap="none"/>
+                    <a:lstStyle/>
+                    <a:p>
+                      <a:pPr>
+                        <a:lnSpc>
+                          <a:spcPts val="1600"/>
+                        </a:lnSpc>
+                        <a:spcAft>
+                          <a:spcPts val="0"/>
+                        </a:spcAft>
+                        <a:defRPr sz="1200" b="0">
+                          <a:solidFill>
+                            <a:srgbClr val="21243A"/>
+                          </a:solidFill>
+                          <a:latin typeface="Arial"/>
+                        </a:defRPr>
+                      </a:pPr>
+                      <a:r>
+                        <a:t>Evidence 3</a:t>
+                      </a:r>
+                    </a:p>
+                  </a:txBody>
+                  <a:tcPr marL="82296" marR="82296" marT="64008" marB="64008">
+                    <a:solidFill>
+                      <a:srgbClr val="FFFFFF"/>
+                    </a:solidFill>
+                  </a:tcPr>
+                </a:tc>
+                <a:tc>
+                  <a:txBody>
+                    <a:bodyPr wrap="none"/>
+                    <a:lstStyle/>
+                    <a:p>
+                      <a:pPr>
+                        <a:lnSpc>
+                          <a:spcPts val="1600"/>
+                        </a:lnSpc>
+                        <a:spcAft>
+                          <a:spcPts val="0"/>
+                        </a:spcAft>
+                        <a:defRPr sz="1200" b="0">
+                          <a:solidFill>
+                            <a:srgbClr val="21243A"/>
+                          </a:solidFill>
+                          <a:latin typeface="Arial"/>
+                        </a:defRPr>
+                      </a:pPr>
+                      <a:r>
+                        <a:t>Noisy, fragmented texture in the grey curly hair, resembling generator detail</a:t>
+                      </a:r>
+                    </a:p>
+                    <a:p>
+                      <a:pPr>
+                        <a:lnSpc>
+                          <a:spcPts val="1600"/>
+                        </a:lnSpc>
+                        <a:spcAft>
+                          <a:spcPts val="0"/>
+                        </a:spcAft>
+                        <a:defRPr sz="1200" b="0">
+                          <a:solidFill>
+                            <a:srgbClr val="21243A"/>
+                          </a:solidFill>
+                          <a:latin typeface="Arial"/>
+                        </a:defRPr>
+                      </a:pPr>
+                      <a:r>
+                        <a:t>artifacts rather than deliberate strokes</a:t>
+                      </a:r>
+                    </a:p>
+                  </a:txBody>
+                  <a:tcPr marL="82296" marR="82296" marT="64008" marB="64008">
+                    <a:solidFill>
+                      <a:srgbClr val="FFFFFF"/>
                     </a:solidFill>
                   </a:tcPr>
                 </a:tc>
@@ -17842,8 +17208,8 @@
           <p:nvPr/>
         </p:nvGraphicFramePr>
         <p:xfrm>
-          <a:off x="365760" y="2602992"/>
-          <a:ext cx="8412479" cy="349504"/>
+          <a:off x="365760" y="2806192"/>
+          <a:ext cx="8412479" cy="552704"/>
         </p:xfrm>
         <a:graphic>
           <a:graphicData uri="http://schemas.openxmlformats.org/drawingml/2006/table">
@@ -17855,64 +17221,83 @@
                 <a:gridCol w="2271369"/>
                 <a:gridCol w="6141110"/>
               </a:tblGrid>
-              <a:tr h="349504">
-                <a:tc>
-                  <a:txBody>
-                    <a:bodyPr wrap="none"/>
-                    <a:lstStyle/>
-                    <a:p>
-                      <a:pPr>
-                        <a:lnSpc>
-                          <a:spcPts val="1600"/>
-                        </a:lnSpc>
-                        <a:spcAft>
-                          <a:spcPts val="0"/>
-                        </a:spcAft>
-                        <a:defRPr sz="1200" b="0">
-                          <a:solidFill>
-                            <a:srgbClr val="21243A"/>
-                          </a:solidFill>
-                          <a:latin typeface="Arial"/>
-                        </a:defRPr>
-                      </a:pPr>
-                      <a:r>
-                        <a:t>Evidence 5</a:t>
-                      </a:r>
-                    </a:p>
-                  </a:txBody>
-                  <a:tcPr marL="82296" marR="82296" marT="64008" marB="64008">
-                    <a:solidFill>
-                      <a:srgbClr val="FFFFFF"/>
-                    </a:solidFill>
-                  </a:tcPr>
-                </a:tc>
-                <a:tc>
-                  <a:txBody>
-                    <a:bodyPr wrap="none"/>
-                    <a:lstStyle/>
-                    <a:p>
-                      <a:pPr>
-                        <a:lnSpc>
-                          <a:spcPts val="1600"/>
-                        </a:lnSpc>
-                        <a:spcAft>
-                          <a:spcPts val="0"/>
-                        </a:spcAft>
-                        <a:defRPr sz="1200" b="0">
-                          <a:solidFill>
-                            <a:srgbClr val="21243A"/>
-                          </a:solidFill>
-                          <a:latin typeface="Arial"/>
-                        </a:defRPr>
-                      </a:pPr>
-                      <a:r>
-                        <a:t>Hands plausible but slightly smoothed, with simplified finger joints</a:t>
-                      </a:r>
-                    </a:p>
-                  </a:txBody>
-                  <a:tcPr marL="82296" marR="82296" marT="64008" marB="64008">
-                    <a:solidFill>
-                      <a:srgbClr val="FFFFFF"/>
+              <a:tr h="552704">
+                <a:tc>
+                  <a:txBody>
+                    <a:bodyPr wrap="none"/>
+                    <a:lstStyle/>
+                    <a:p>
+                      <a:pPr>
+                        <a:lnSpc>
+                          <a:spcPts val="1600"/>
+                        </a:lnSpc>
+                        <a:spcAft>
+                          <a:spcPts val="0"/>
+                        </a:spcAft>
+                        <a:defRPr sz="1200" b="0">
+                          <a:solidFill>
+                            <a:srgbClr val="21243A"/>
+                          </a:solidFill>
+                          <a:latin typeface="Arial"/>
+                        </a:defRPr>
+                      </a:pPr>
+                      <a:r>
+                        <a:t>Evidence 4</a:t>
+                      </a:r>
+                    </a:p>
+                  </a:txBody>
+                  <a:tcPr marL="82296" marR="82296" marT="64008" marB="64008">
+                    <a:solidFill>
+                      <a:srgbClr val="F1F7F7"/>
+                    </a:solidFill>
+                  </a:tcPr>
+                </a:tc>
+                <a:tc>
+                  <a:txBody>
+                    <a:bodyPr wrap="none"/>
+                    <a:lstStyle/>
+                    <a:p>
+                      <a:pPr>
+                        <a:lnSpc>
+                          <a:spcPts val="1600"/>
+                        </a:lnSpc>
+                        <a:spcAft>
+                          <a:spcPts val="0"/>
+                        </a:spcAft>
+                        <a:defRPr sz="1200" b="0">
+                          <a:solidFill>
+                            <a:srgbClr val="21243A"/>
+                          </a:solidFill>
+                          <a:latin typeface="Arial"/>
+                        </a:defRPr>
+                      </a:pPr>
+                      <a:r>
+                        <a:t>Tablet screen shows an indistinct garden/playground scene with smeared,</a:t>
+                      </a:r>
+                    </a:p>
+                    <a:p>
+                      <a:pPr>
+                        <a:lnSpc>
+                          <a:spcPts val="1600"/>
+                        </a:lnSpc>
+                        <a:spcAft>
+                          <a:spcPts val="0"/>
+                        </a:spcAft>
+                        <a:defRPr sz="1200" b="0">
+                          <a:solidFill>
+                            <a:srgbClr val="21243A"/>
+                          </a:solidFill>
+                          <a:latin typeface="Arial"/>
+                        </a:defRPr>
+                      </a:pPr>
+                      <a:r>
+                        <a:t>non-specific detail</a:t>
+                      </a:r>
+                    </a:p>
+                  </a:txBody>
+                  <a:tcPr marL="82296" marR="82296" marT="64008" marB="64008">
+                    <a:solidFill>
+                      <a:srgbClr val="F1F7F7"/>
                     </a:solidFill>
                   </a:tcPr>
                 </a:tc>
@@ -17930,7 +17315,7 @@
           <p:nvPr/>
         </p:nvGraphicFramePr>
         <p:xfrm>
-          <a:off x="365760" y="2952496"/>
+          <a:off x="365760" y="3358896"/>
           <a:ext cx="8412479" cy="552704"/>
         </p:xfrm>
         <a:graphic>
@@ -17964,62 +17349,62 @@
                         </a:defRPr>
                       </a:pPr>
                       <a:r>
-                        <a:t>Evidence 6</a:t>
-                      </a:r>
-                    </a:p>
-                  </a:txBody>
-                  <a:tcPr marL="82296" marR="82296" marT="64008" marB="64008">
-                    <a:solidFill>
-                      <a:srgbClr val="F1F7F7"/>
-                    </a:solidFill>
-                  </a:tcPr>
-                </a:tc>
-                <a:tc>
-                  <a:txBody>
-                    <a:bodyPr wrap="none"/>
-                    <a:lstStyle/>
-                    <a:p>
-                      <a:pPr>
-                        <a:lnSpc>
-                          <a:spcPts val="1600"/>
-                        </a:lnSpc>
-                        <a:spcAft>
-                          <a:spcPts val="0"/>
-                        </a:spcAft>
-                        <a:defRPr sz="1200" b="0">
-                          <a:solidFill>
-                            <a:srgbClr val="21243A"/>
-                          </a:solidFill>
-                          <a:latin typeface="Arial"/>
-                        </a:defRPr>
-                      </a:pPr>
-                      <a:r>
-                        <a:t>Wheelchair and basketball rendered at high detail while the table base is very</a:t>
-                      </a:r>
-                    </a:p>
-                    <a:p>
-                      <a:pPr>
-                        <a:lnSpc>
-                          <a:spcPts val="1600"/>
-                        </a:lnSpc>
-                        <a:spcAft>
-                          <a:spcPts val="0"/>
-                        </a:spcAft>
-                        <a:defRPr sz="1200" b="0">
-                          <a:solidFill>
-                            <a:srgbClr val="21243A"/>
-                          </a:solidFill>
-                          <a:latin typeface="Arial"/>
-                        </a:defRPr>
-                      </a:pPr>
-                      <a:r>
-                        <a:t>simple</a:t>
-                      </a:r>
-                    </a:p>
-                  </a:txBody>
-                  <a:tcPr marL="82296" marR="82296" marT="64008" marB="64008">
-                    <a:solidFill>
-                      <a:srgbClr val="F1F7F7"/>
+                        <a:t>Evidence 5</a:t>
+                      </a:r>
+                    </a:p>
+                  </a:txBody>
+                  <a:tcPr marL="82296" marR="82296" marT="64008" marB="64008">
+                    <a:solidFill>
+                      <a:srgbClr val="FFFFFF"/>
+                    </a:solidFill>
+                  </a:tcPr>
+                </a:tc>
+                <a:tc>
+                  <a:txBody>
+                    <a:bodyPr wrap="none"/>
+                    <a:lstStyle/>
+                    <a:p>
+                      <a:pPr>
+                        <a:lnSpc>
+                          <a:spcPts val="1600"/>
+                        </a:lnSpc>
+                        <a:spcAft>
+                          <a:spcPts val="0"/>
+                        </a:spcAft>
+                        <a:defRPr sz="1200" b="0">
+                          <a:solidFill>
+                            <a:srgbClr val="21243A"/>
+                          </a:solidFill>
+                          <a:latin typeface="Arial"/>
+                        </a:defRPr>
+                      </a:pPr>
+                      <a:r>
+                        <a:t>Wheelchair spokes and frame are mostly plausible but slightly irregular in spacing</a:t>
+                      </a:r>
+                    </a:p>
+                    <a:p>
+                      <a:pPr>
+                        <a:lnSpc>
+                          <a:spcPts val="1600"/>
+                        </a:lnSpc>
+                        <a:spcAft>
+                          <a:spcPts val="0"/>
+                        </a:spcAft>
+                        <a:defRPr sz="1200" b="0">
+                          <a:solidFill>
+                            <a:srgbClr val="21243A"/>
+                          </a:solidFill>
+                          <a:latin typeface="Arial"/>
+                        </a:defRPr>
+                      </a:pPr>
+                      <a:r>
+                        <a:t>and junctions</a:t>
+                      </a:r>
+                    </a:p>
+                  </a:txBody>
+                  <a:tcPr marL="82296" marR="82296" marT="64008" marB="64008">
+                    <a:solidFill>
+                      <a:srgbClr val="FFFFFF"/>
                     </a:solidFill>
                   </a:tcPr>
                 </a:tc>
@@ -18037,7 +17422,7 @@
           <p:nvPr/>
         </p:nvGraphicFramePr>
         <p:xfrm>
-          <a:off x="365760" y="3505200"/>
+          <a:off x="365760" y="3911600"/>
           <a:ext cx="8412479" cy="349504"/>
         </p:xfrm>
         <a:graphic>
@@ -18071,43 +17456,43 @@
                         </a:defRPr>
                       </a:pPr>
                       <a:r>
-                        <a:t>Evidence 7</a:t>
-                      </a:r>
-                    </a:p>
-                  </a:txBody>
-                  <a:tcPr marL="82296" marR="82296" marT="64008" marB="64008">
-                    <a:solidFill>
-                      <a:srgbClr val="FFFFFF"/>
-                    </a:solidFill>
-                  </a:tcPr>
-                </a:tc>
-                <a:tc>
-                  <a:txBody>
-                    <a:bodyPr wrap="none"/>
-                    <a:lstStyle/>
-                    <a:p>
-                      <a:pPr>
-                        <a:lnSpc>
-                          <a:spcPts val="1600"/>
-                        </a:lnSpc>
-                        <a:spcAft>
-                          <a:spcPts val="0"/>
-                        </a:spcAft>
-                        <a:defRPr sz="1200" b="0">
-                          <a:solidFill>
-                            <a:srgbClr val="21243A"/>
-                          </a:solidFill>
-                          <a:latin typeface="Arial"/>
-                        </a:defRPr>
-                      </a:pPr>
-                      <a:r>
-                        <a:t>Clean white background with slight halo/edge fringing around figures</a:t>
-                      </a:r>
-                    </a:p>
-                  </a:txBody>
-                  <a:tcPr marL="82296" marR="82296" marT="64008" marB="64008">
-                    <a:solidFill>
-                      <a:srgbClr val="FFFFFF"/>
+                        <a:t>Evidence 6</a:t>
+                      </a:r>
+                    </a:p>
+                  </a:txBody>
+                  <a:tcPr marL="82296" marR="82296" marT="64008" marB="64008">
+                    <a:solidFill>
+                      <a:srgbClr val="F1F7F7"/>
+                    </a:solidFill>
+                  </a:tcPr>
+                </a:tc>
+                <a:tc>
+                  <a:txBody>
+                    <a:bodyPr wrap="none"/>
+                    <a:lstStyle/>
+                    <a:p>
+                      <a:pPr>
+                        <a:lnSpc>
+                          <a:spcPts val="1600"/>
+                        </a:lnSpc>
+                        <a:spcAft>
+                          <a:spcPts val="0"/>
+                        </a:spcAft>
+                        <a:defRPr sz="1200" b="0">
+                          <a:solidFill>
+                            <a:srgbClr val="21243A"/>
+                          </a:solidFill>
+                          <a:latin typeface="Arial"/>
+                        </a:defRPr>
+                      </a:pPr>
+                      <a:r>
+                        <a:t>Hands are well formed overall, which lowers but does not remove suspicion</a:t>
+                      </a:r>
+                    </a:p>
+                  </a:txBody>
+                  <a:tcPr marL="82296" marR="82296" marT="64008" marB="64008">
+                    <a:solidFill>
+                      <a:srgbClr val="F1F7F7"/>
                     </a:solidFill>
                   </a:tcPr>
                 </a:tc>
@@ -18125,7 +17510,7 @@
           <p:nvPr/>
         </p:nvGraphicFramePr>
         <p:xfrm>
-          <a:off x="365760" y="3854704"/>
+          <a:off x="365760" y="4261104"/>
           <a:ext cx="8412479" cy="349504"/>
         </p:xfrm>
         <a:graphic>
@@ -18159,43 +17544,43 @@
                         </a:defRPr>
                       </a:pPr>
                       <a:r>
-                        <a:t>Evidence 8</a:t>
-                      </a:r>
-                    </a:p>
-                  </a:txBody>
-                  <a:tcPr marL="82296" marR="82296" marT="64008" marB="64008">
-                    <a:solidFill>
-                      <a:srgbClr val="F1F7F7"/>
-                    </a:solidFill>
-                  </a:tcPr>
-                </a:tc>
-                <a:tc>
-                  <a:txBody>
-                    <a:bodyPr wrap="none"/>
-                    <a:lstStyle/>
-                    <a:p>
-                      <a:pPr>
-                        <a:lnSpc>
-                          <a:spcPts val="1600"/>
-                        </a:lnSpc>
-                        <a:spcAft>
-                          <a:spcPts val="0"/>
-                        </a:spcAft>
-                        <a:defRPr sz="1200" b="0">
-                          <a:solidFill>
-                            <a:srgbClr val="21243A"/>
-                          </a:solidFill>
-                          <a:latin typeface="Arial"/>
-                        </a:defRPr>
-                      </a:pPr>
-                      <a:r>
-                        <a:t>No camera signals (not a photograph), so lens/noise analysis not applicable</a:t>
-                      </a:r>
-                    </a:p>
-                  </a:txBody>
-                  <a:tcPr marL="82296" marR="82296" marT="64008" marB="64008">
-                    <a:solidFill>
-                      <a:srgbClr val="F1F7F7"/>
+                        <a:t>Evidence 7</a:t>
+                      </a:r>
+                    </a:p>
+                  </a:txBody>
+                  <a:tcPr marL="82296" marR="82296" marT="64008" marB="64008">
+                    <a:solidFill>
+                      <a:srgbClr val="FFFFFF"/>
+                    </a:solidFill>
+                  </a:tcPr>
+                </a:tc>
+                <a:tc>
+                  <a:txBody>
+                    <a:bodyPr wrap="none"/>
+                    <a:lstStyle/>
+                    <a:p>
+                      <a:pPr>
+                        <a:lnSpc>
+                          <a:spcPts val="1600"/>
+                        </a:lnSpc>
+                        <a:spcAft>
+                          <a:spcPts val="0"/>
+                        </a:spcAft>
+                        <a:defRPr sz="1200" b="0">
+                          <a:solidFill>
+                            <a:srgbClr val="21243A"/>
+                          </a:solidFill>
+                          <a:latin typeface="Arial"/>
+                        </a:defRPr>
+                      </a:pPr>
+                      <a:r>
+                        <a:t>Stock-style composition, clean white background, no signature, no watermark</a:t>
+                      </a:r>
+                    </a:p>
+                  </a:txBody>
+                  <a:tcPr marL="82296" marR="82296" marT="64008" marB="64008">
+                    <a:solidFill>
+                      <a:srgbClr val="FFFFFF"/>
                     </a:solidFill>
                   </a:tcPr>
                 </a:tc>
@@ -18213,7 +17598,7 @@
           <p:nvPr/>
         </p:nvGraphicFramePr>
         <p:xfrm>
-          <a:off x="365760" y="4204208"/>
+          <a:off x="365760" y="4610608"/>
           <a:ext cx="8412479" cy="755904"/>
         </p:xfrm>
         <a:graphic>
@@ -18247,81 +17632,81 @@
                         </a:defRPr>
                       </a:pPr>
                       <a:r>
-                        <a:t>Evidence 9</a:t>
-                      </a:r>
-                    </a:p>
-                  </a:txBody>
-                  <a:tcPr marL="82296" marR="82296" marT="64008" marB="64008">
-                    <a:solidFill>
-                      <a:srgbClr val="FFFFFF"/>
-                    </a:solidFill>
-                  </a:tcPr>
-                </a:tc>
-                <a:tc>
-                  <a:txBody>
-                    <a:bodyPr wrap="none"/>
-                    <a:lstStyle/>
-                    <a:p>
-                      <a:pPr>
-                        <a:lnSpc>
-                          <a:spcPts val="1600"/>
-                        </a:lnSpc>
-                        <a:spcAft>
-                          <a:spcPts val="0"/>
-                        </a:spcAft>
-                        <a:defRPr sz="1200" b="0">
-                          <a:solidFill>
-                            <a:srgbClr val="21243A"/>
-                          </a:solidFill>
-                          <a:latin typeface="Arial"/>
-                        </a:defRPr>
-                      </a:pPr>
-                      <a:r>
-                        <a:t>Caveat: This is an illustration, not a photo, so the rating reflects stylistic generator</a:t>
-                      </a:r>
-                    </a:p>
-                    <a:p>
-                      <a:pPr>
-                        <a:lnSpc>
-                          <a:spcPts val="1600"/>
-                        </a:lnSpc>
-                        <a:spcAft>
-                          <a:spcPts val="0"/>
-                        </a:spcAft>
-                        <a:defRPr sz="1200" b="0">
-                          <a:solidFill>
-                            <a:srgbClr val="21243A"/>
-                          </a:solidFill>
-                          <a:latin typeface="Arial"/>
-                        </a:defRPr>
-                      </a:pPr>
-                      <a:r>
-                        <a:t>tells versus human digital artwork. Skilled human illustrators can produce similar</a:t>
-                      </a:r>
-                    </a:p>
-                    <a:p>
-                      <a:pPr>
-                        <a:lnSpc>
-                          <a:spcPts val="1600"/>
-                        </a:lnSpc>
-                        <a:spcAft>
-                          <a:spcPts val="0"/>
-                        </a:spcAft>
-                        <a:defRPr sz="1200" b="0">
-                          <a:solidFill>
-                            <a:srgbClr val="21243A"/>
-                          </a:solidFill>
-                          <a:latin typeface="Arial"/>
-                        </a:defRPr>
-                      </a:pPr>
-                      <a:r>
-                        <a:t>results, so provenance metadata or the source should be checked.</a:t>
-                      </a:r>
-                    </a:p>
-                  </a:txBody>
-                  <a:tcPr marL="82296" marR="82296" marT="64008" marB="64008">
-                    <a:solidFill>
-                      <a:srgbClr val="FFFFFF"/>
+                        <a:t>Evidence 8</a:t>
+                      </a:r>
+                    </a:p>
+                  </a:txBody>
+                  <a:tcPr marL="82296" marR="82296" marT="64008" marB="64008">
+                    <a:solidFill>
+                      <a:srgbClr val="F1F7F7"/>
+                    </a:solidFill>
+                  </a:tcPr>
+                </a:tc>
+                <a:tc>
+                  <a:txBody>
+                    <a:bodyPr wrap="none"/>
+                    <a:lstStyle/>
+                    <a:p>
+                      <a:pPr>
+                        <a:lnSpc>
+                          <a:spcPts val="1600"/>
+                        </a:lnSpc>
+                        <a:spcAft>
+                          <a:spcPts val="0"/>
+                        </a:spcAft>
+                        <a:defRPr sz="1200" b="0">
+                          <a:solidFill>
+                            <a:srgbClr val="21243A"/>
+                          </a:solidFill>
+                          <a:latin typeface="Arial"/>
+                        </a:defRPr>
+                      </a:pPr>
+                      <a:r>
+                        <a:t>Caveat: Skilled human digital illustrators can produce this polished style, and the</a:t>
+                      </a:r>
+                    </a:p>
+                    <a:p>
+                      <a:pPr>
+                        <a:lnSpc>
+                          <a:spcPts val="1600"/>
+                        </a:lnSpc>
+                        <a:spcAft>
+                          <a:spcPts val="0"/>
+                        </a:spcAft>
+                        <a:defRPr sz="1200" b="0">
+                          <a:solidFill>
+                            <a:srgbClr val="21243A"/>
+                          </a:solidFill>
+                          <a:latin typeface="Arial"/>
+                        </a:defRPr>
+                      </a:pPr>
+                      <a:r>
+                        <a:t>hands and anatomy are largely coherent. Style cues alone cannot confirm AI</a:t>
+                      </a:r>
+                    </a:p>
+                    <a:p>
+                      <a:pPr>
+                        <a:lnSpc>
+                          <a:spcPts val="1600"/>
+                        </a:lnSpc>
+                        <a:spcAft>
+                          <a:spcPts val="0"/>
+                        </a:spcAft>
+                        <a:defRPr sz="1200" b="0">
+                          <a:solidFill>
+                            <a:srgbClr val="21243A"/>
+                          </a:solidFill>
+                          <a:latin typeface="Arial"/>
+                        </a:defRPr>
+                      </a:pPr>
+                      <a:r>
+                        <a:t>origin, so check file metadata/C2PA, the artist's source, or reverse image search.</a:t>
+                      </a:r>
+                    </a:p>
+                  </a:txBody>
+                  <a:tcPr marL="82296" marR="82296" marT="64008" marB="64008">
+                    <a:solidFill>
+                      <a:srgbClr val="F1F7F7"/>
                     </a:solidFill>
                   </a:tcPr>
                 </a:tc>
@@ -19142,7 +18527,7 @@
         </p:nvGraphicFramePr>
         <p:xfrm>
           <a:off x="365760" y="3797808"/>
-          <a:ext cx="8412479" cy="1162304"/>
+          <a:ext cx="8412479" cy="1365503"/>
         </p:xfrm>
         <a:graphic>
           <a:graphicData uri="http://schemas.openxmlformats.org/drawingml/2006/table">
@@ -19154,7 +18539,7 @@
                 <a:gridCol w="2271369"/>
                 <a:gridCol w="6141110"/>
               </a:tblGrid>
-              <a:tr h="1162304">
+              <a:tr h="1365503">
                 <a:tc>
                   <a:txBody>
                     <a:bodyPr wrap="none"/>
@@ -19205,83 +18590,102 @@
                         </a:defRPr>
                       </a:pPr>
                       <a:r>
-                        <a:t>synthetic likelihood 78/100; tells: Gray hair contains tangled, ribbon-like shapes</a:t>
-                      </a:r>
-                    </a:p>
-                    <a:p>
-                      <a:pPr>
-                        <a:lnSpc>
-                          <a:spcPts val="1600"/>
-                        </a:lnSpc>
-                        <a:spcAft>
-                          <a:spcPts val="0"/>
-                        </a:spcAft>
-                        <a:defRPr sz="1200" b="0">
-                          <a:solidFill>
-                            <a:srgbClr val="21243A"/>
-                          </a:solidFill>
-                          <a:latin typeface="Arial"/>
-                        </a:defRPr>
-                      </a:pPr>
-                      <a:r>
-                        <a:t>inconsistent with the other hair rendering., Wheelchair spokes and frame</a:t>
-                      </a:r>
-                    </a:p>
-                    <a:p>
-                      <a:pPr>
-                        <a:lnSpc>
-                          <a:spcPts val="1600"/>
-                        </a:lnSpc>
-                        <a:spcAft>
-                          <a:spcPts val="0"/>
-                        </a:spcAft>
-                        <a:defRPr sz="1200" b="0">
-                          <a:solidFill>
-                            <a:srgbClr val="21243A"/>
-                          </a:solidFill>
-                          <a:latin typeface="Arial"/>
-                        </a:defRPr>
-                      </a:pPr>
-                      <a:r>
-                        <a:t>supports intersect in mechanically ambiguous ways., Gesturing hands have</a:t>
-                      </a:r>
-                    </a:p>
-                    <a:p>
-                      <a:pPr>
-                        <a:lnSpc>
-                          <a:spcPts val="1600"/>
-                        </a:lnSpc>
-                        <a:spcAft>
-                          <a:spcPts val="0"/>
-                        </a:spcAft>
-                        <a:defRPr sz="1200" b="0">
-                          <a:solidFill>
-                            <a:srgbClr val="21243A"/>
-                          </a:solidFill>
-                          <a:latin typeface="Arial"/>
-                        </a:defRPr>
-                      </a:pPr>
-                      <a:r>
-                        <a:t>uneven finger separation and awkward contours., Illustrated outlines and smooth</a:t>
-                      </a:r>
-                    </a:p>
-                    <a:p>
-                      <a:pPr>
-                        <a:lnSpc>
-                          <a:spcPts val="1600"/>
-                        </a:lnSpc>
-                        <a:spcAft>
-                          <a:spcPts val="0"/>
-                        </a:spcAft>
-                        <a:defRPr sz="1200" b="0">
-                          <a:solidFill>
-                            <a:srgbClr val="21243A"/>
-                          </a:solidFill>
-                          <a:latin typeface="Arial"/>
-                        </a:defRPr>
-                      </a:pPr>
-                      <a:r>
-                        <a:t>shading throughout; no photographic base is evident.</a:t>
+                        <a:t>synthetic likelihood 78/100; tells: Older woman's gray hair contains tangled,</a:t>
+                      </a:r>
+                    </a:p>
+                    <a:p>
+                      <a:pPr>
+                        <a:lnSpc>
+                          <a:spcPts val="1600"/>
+                        </a:lnSpc>
+                        <a:spcAft>
+                          <a:spcPts val="0"/>
+                        </a:spcAft>
+                        <a:defRPr sz="1200" b="0">
+                          <a:solidFill>
+                            <a:srgbClr val="21243A"/>
+                          </a:solidFill>
+                          <a:latin typeface="Arial"/>
+                        </a:defRPr>
+                      </a:pPr>
+                      <a:r>
+                        <a:t>ribbon-like shapes inconsistent with the other hair rendering., Wheelchair spokes</a:t>
+                      </a:r>
+                    </a:p>
+                    <a:p>
+                      <a:pPr>
+                        <a:lnSpc>
+                          <a:spcPts val="1600"/>
+                        </a:lnSpc>
+                        <a:spcAft>
+                          <a:spcPts val="0"/>
+                        </a:spcAft>
+                        <a:defRPr sz="1200" b="0">
+                          <a:solidFill>
+                            <a:srgbClr val="21243A"/>
+                          </a:solidFill>
+                          <a:latin typeface="Arial"/>
+                        </a:defRPr>
+                      </a:pPr>
+                      <a:r>
+                        <a:t>and lower frame tubes form irregular junctions and ambiguous connections.,</a:t>
+                      </a:r>
+                    </a:p>
+                    <a:p>
+                      <a:pPr>
+                        <a:lnSpc>
+                          <a:spcPts val="1600"/>
+                        </a:lnSpc>
+                        <a:spcAft>
+                          <a:spcPts val="0"/>
+                        </a:spcAft>
+                        <a:defRPr sz="1200" b="0">
+                          <a:solidFill>
+                            <a:srgbClr val="21243A"/>
+                          </a:solidFill>
+                          <a:latin typeface="Arial"/>
+                        </a:defRPr>
+                      </a:pPr>
+                      <a:r>
+                        <a:t>Gesturing hands have uneven finger separation and merged-looking contours.,</a:t>
+                      </a:r>
+                    </a:p>
+                    <a:p>
+                      <a:pPr>
+                        <a:lnSpc>
+                          <a:spcPts val="1600"/>
+                        </a:lnSpc>
+                        <a:spcAft>
+                          <a:spcPts val="0"/>
+                        </a:spcAft>
+                        <a:defRPr sz="1200" b="0">
+                          <a:solidFill>
+                            <a:srgbClr val="21243A"/>
+                          </a:solidFill>
+                          <a:latin typeface="Arial"/>
+                        </a:defRPr>
+                      </a:pPr>
+                      <a:r>
+                        <a:t>Tablet garden has noticeably softer, less defined detail than the surrounding</a:t>
+                      </a:r>
+                    </a:p>
+                    <a:p>
+                      <a:pPr>
+                        <a:lnSpc>
+                          <a:spcPts val="1600"/>
+                        </a:lnSpc>
+                        <a:spcAft>
+                          <a:spcPts val="0"/>
+                        </a:spcAft>
+                        <a:defRPr sz="1200" b="0">
+                          <a:solidFill>
+                            <a:srgbClr val="21243A"/>
+                          </a:solidFill>
+                          <a:latin typeface="Arial"/>
+                        </a:defRPr>
+                      </a:pPr>
+                      <a:r>
+                        <a:t>outlined illustration.</a:t>
                       </a:r>
                     </a:p>
                   </a:txBody>
@@ -19305,7 +18709,7 @@
           <p:nvPr/>
         </p:nvGraphicFramePr>
         <p:xfrm>
-          <a:off x="365760" y="4960112"/>
+          <a:off x="365760" y="5163312"/>
           <a:ext cx="8412479" cy="552704"/>
         </p:xfrm>
         <a:graphic>
@@ -19369,120 +18773,32 @@
                         </a:defRPr>
                       </a:pPr>
                       <a:r>
-                        <a:t>Gray hair contains tangled, ribbon-like shapes inconsistent with the other hair</a:t>
-                      </a:r>
-                    </a:p>
-                    <a:p>
-                      <a:pPr>
-                        <a:lnSpc>
-                          <a:spcPts val="1600"/>
-                        </a:lnSpc>
-                        <a:spcAft>
-                          <a:spcPts val="0"/>
-                        </a:spcAft>
-                        <a:defRPr sz="1200" b="0">
-                          <a:solidFill>
-                            <a:srgbClr val="21243A"/>
-                          </a:solidFill>
-                          <a:latin typeface="Arial"/>
-                        </a:defRPr>
-                      </a:pPr>
-                      <a:r>
-                        <a:t>rendering.</a:t>
+                        <a:t>Older woman's gray hair contains tangled, ribbon-like shapes inconsistent with</a:t>
+                      </a:r>
+                    </a:p>
+                    <a:p>
+                      <a:pPr>
+                        <a:lnSpc>
+                          <a:spcPts val="1600"/>
+                        </a:lnSpc>
+                        <a:spcAft>
+                          <a:spcPts val="0"/>
+                        </a:spcAft>
+                        <a:defRPr sz="1200" b="0">
+                          <a:solidFill>
+                            <a:srgbClr val="21243A"/>
+                          </a:solidFill>
+                          <a:latin typeface="Arial"/>
+                        </a:defRPr>
+                      </a:pPr>
+                      <a:r>
+                        <a:t>the other hair rendering.</a:t>
                       </a:r>
                     </a:p>
                   </a:txBody>
                   <a:tcPr marL="82296" marR="82296" marT="64008" marB="64008">
                     <a:solidFill>
                       <a:srgbClr val="FFFFFF"/>
-                    </a:solidFill>
-                  </a:tcPr>
-                </a:tc>
-              </a:tr>
-            </a:tbl>
-          </a:graphicData>
-        </a:graphic>
-      </p:graphicFrame>
-      <p:graphicFrame>
-        <p:nvGraphicFramePr>
-          <p:cNvPr id="15" name="Table 14"/>
-          <p:cNvGraphicFramePr>
-            <a:graphicFrameLocks noGrp="1"/>
-          </p:cNvGraphicFramePr>
-          <p:nvPr/>
-        </p:nvGraphicFramePr>
-        <p:xfrm>
-          <a:off x="365760" y="5512816"/>
-          <a:ext cx="8412479" cy="349504"/>
-        </p:xfrm>
-        <a:graphic>
-          <a:graphicData uri="http://schemas.openxmlformats.org/drawingml/2006/table">
-            <a:tbl>
-              <a:tblPr firstRow="1" bandRow="1">
-                <a:tableStyleId>{5C22544A-7EE6-4342-B048-85BDC9FD1C3A}</a:tableStyleId>
-              </a:tblPr>
-              <a:tblGrid>
-                <a:gridCol w="2271369"/>
-                <a:gridCol w="6141110"/>
-              </a:tblGrid>
-              <a:tr h="349504">
-                <a:tc>
-                  <a:txBody>
-                    <a:bodyPr wrap="none"/>
-                    <a:lstStyle/>
-                    <a:p>
-                      <a:pPr>
-                        <a:lnSpc>
-                          <a:spcPts val="1600"/>
-                        </a:lnSpc>
-                        <a:spcAft>
-                          <a:spcPts val="0"/>
-                        </a:spcAft>
-                        <a:defRPr sz="1200" b="0">
-                          <a:solidFill>
-                            <a:srgbClr val="21243A"/>
-                          </a:solidFill>
-                          <a:latin typeface="Arial"/>
-                        </a:defRPr>
-                      </a:pPr>
-                      <a:r>
-                        <a:t>Evidence 2</a:t>
-                      </a:r>
-                    </a:p>
-                  </a:txBody>
-                  <a:tcPr marL="82296" marR="82296" marT="64008" marB="64008">
-                    <a:solidFill>
-                      <a:srgbClr val="F1F7F7"/>
-                    </a:solidFill>
-                  </a:tcPr>
-                </a:tc>
-                <a:tc>
-                  <a:txBody>
-                    <a:bodyPr wrap="none"/>
-                    <a:lstStyle/>
-                    <a:p>
-                      <a:pPr>
-                        <a:lnSpc>
-                          <a:spcPts val="1600"/>
-                        </a:lnSpc>
-                        <a:spcAft>
-                          <a:spcPts val="0"/>
-                        </a:spcAft>
-                        <a:defRPr sz="1200" b="0">
-                          <a:solidFill>
-                            <a:srgbClr val="21243A"/>
-                          </a:solidFill>
-                          <a:latin typeface="Arial"/>
-                        </a:defRPr>
-                      </a:pPr>
-                      <a:r>
-                        <a:t>Wheelchair spokes and frame supports intersect in mechanically ambiguous ways.</a:t>
-                      </a:r>
-                    </a:p>
-                  </a:txBody>
-                  <a:tcPr marL="82296" marR="82296" marT="64008" marB="64008">
-                    <a:solidFill>
-                      <a:srgbClr val="F1F7F7"/>
                     </a:solidFill>
                   </a:tcPr>
                 </a:tc>
@@ -19775,7 +19091,7 @@
         </p:nvGraphicFramePr>
         <p:xfrm>
           <a:off x="365760" y="1700784"/>
-          <a:ext cx="8412479" cy="349504"/>
+          <a:ext cx="8412479" cy="552704"/>
         </p:xfrm>
         <a:graphic>
           <a:graphicData uri="http://schemas.openxmlformats.org/drawingml/2006/table">
@@ -19787,64 +19103,83 @@
                 <a:gridCol w="2271369"/>
                 <a:gridCol w="6141110"/>
               </a:tblGrid>
-              <a:tr h="349504">
-                <a:tc>
-                  <a:txBody>
-                    <a:bodyPr wrap="none"/>
-                    <a:lstStyle/>
-                    <a:p>
-                      <a:pPr>
-                        <a:lnSpc>
-                          <a:spcPts val="1600"/>
-                        </a:lnSpc>
-                        <a:spcAft>
-                          <a:spcPts val="0"/>
-                        </a:spcAft>
-                        <a:defRPr sz="1200" b="0">
-                          <a:solidFill>
-                            <a:srgbClr val="21243A"/>
-                          </a:solidFill>
-                          <a:latin typeface="Arial"/>
-                        </a:defRPr>
-                      </a:pPr>
-                      <a:r>
-                        <a:t>Evidence 3</a:t>
-                      </a:r>
-                    </a:p>
-                  </a:txBody>
-                  <a:tcPr marL="82296" marR="82296" marT="64008" marB="64008">
-                    <a:solidFill>
-                      <a:srgbClr val="FFFFFF"/>
-                    </a:solidFill>
-                  </a:tcPr>
-                </a:tc>
-                <a:tc>
-                  <a:txBody>
-                    <a:bodyPr wrap="none"/>
-                    <a:lstStyle/>
-                    <a:p>
-                      <a:pPr>
-                        <a:lnSpc>
-                          <a:spcPts val="1600"/>
-                        </a:lnSpc>
-                        <a:spcAft>
-                          <a:spcPts val="0"/>
-                        </a:spcAft>
-                        <a:defRPr sz="1200" b="0">
-                          <a:solidFill>
-                            <a:srgbClr val="21243A"/>
-                          </a:solidFill>
-                          <a:latin typeface="Arial"/>
-                        </a:defRPr>
-                      </a:pPr>
-                      <a:r>
-                        <a:t>Gesturing hands have uneven finger separation and awkward contours.</a:t>
-                      </a:r>
-                    </a:p>
-                  </a:txBody>
-                  <a:tcPr marL="82296" marR="82296" marT="64008" marB="64008">
-                    <a:solidFill>
-                      <a:srgbClr val="FFFFFF"/>
+              <a:tr h="552704">
+                <a:tc>
+                  <a:txBody>
+                    <a:bodyPr wrap="none"/>
+                    <a:lstStyle/>
+                    <a:p>
+                      <a:pPr>
+                        <a:lnSpc>
+                          <a:spcPts val="1600"/>
+                        </a:lnSpc>
+                        <a:spcAft>
+                          <a:spcPts val="0"/>
+                        </a:spcAft>
+                        <a:defRPr sz="1200" b="0">
+                          <a:solidFill>
+                            <a:srgbClr val="21243A"/>
+                          </a:solidFill>
+                          <a:latin typeface="Arial"/>
+                        </a:defRPr>
+                      </a:pPr>
+                      <a:r>
+                        <a:t>Evidence 2</a:t>
+                      </a:r>
+                    </a:p>
+                  </a:txBody>
+                  <a:tcPr marL="82296" marR="82296" marT="64008" marB="64008">
+                    <a:solidFill>
+                      <a:srgbClr val="F1F7F7"/>
+                    </a:solidFill>
+                  </a:tcPr>
+                </a:tc>
+                <a:tc>
+                  <a:txBody>
+                    <a:bodyPr wrap="none"/>
+                    <a:lstStyle/>
+                    <a:p>
+                      <a:pPr>
+                        <a:lnSpc>
+                          <a:spcPts val="1600"/>
+                        </a:lnSpc>
+                        <a:spcAft>
+                          <a:spcPts val="0"/>
+                        </a:spcAft>
+                        <a:defRPr sz="1200" b="0">
+                          <a:solidFill>
+                            <a:srgbClr val="21243A"/>
+                          </a:solidFill>
+                          <a:latin typeface="Arial"/>
+                        </a:defRPr>
+                      </a:pPr>
+                      <a:r>
+                        <a:t>Wheelchair spokes and lower frame tubes form irregular junctions and</a:t>
+                      </a:r>
+                    </a:p>
+                    <a:p>
+                      <a:pPr>
+                        <a:lnSpc>
+                          <a:spcPts val="1600"/>
+                        </a:lnSpc>
+                        <a:spcAft>
+                          <a:spcPts val="0"/>
+                        </a:spcAft>
+                        <a:defRPr sz="1200" b="0">
+                          <a:solidFill>
+                            <a:srgbClr val="21243A"/>
+                          </a:solidFill>
+                          <a:latin typeface="Arial"/>
+                        </a:defRPr>
+                      </a:pPr>
+                      <a:r>
+                        <a:t>ambiguous connections.</a:t>
+                      </a:r>
+                    </a:p>
+                  </a:txBody>
+                  <a:tcPr marL="82296" marR="82296" marT="64008" marB="64008">
+                    <a:solidFill>
+                      <a:srgbClr val="F1F7F7"/>
                     </a:solidFill>
                   </a:tcPr>
                 </a:tc>
@@ -19862,8 +19197,8 @@
           <p:nvPr/>
         </p:nvGraphicFramePr>
         <p:xfrm>
-          <a:off x="365760" y="2050288"/>
-          <a:ext cx="8412479" cy="552704"/>
+          <a:off x="365760" y="2253488"/>
+          <a:ext cx="8412479" cy="349504"/>
         </p:xfrm>
         <a:graphic>
           <a:graphicData uri="http://schemas.openxmlformats.org/drawingml/2006/table">
@@ -19875,83 +19210,64 @@
                 <a:gridCol w="2271369"/>
                 <a:gridCol w="6141110"/>
               </a:tblGrid>
-              <a:tr h="552704">
-                <a:tc>
-                  <a:txBody>
-                    <a:bodyPr wrap="none"/>
-                    <a:lstStyle/>
-                    <a:p>
-                      <a:pPr>
-                        <a:lnSpc>
-                          <a:spcPts val="1600"/>
-                        </a:lnSpc>
-                        <a:spcAft>
-                          <a:spcPts val="0"/>
-                        </a:spcAft>
-                        <a:defRPr sz="1200" b="0">
-                          <a:solidFill>
-                            <a:srgbClr val="21243A"/>
-                          </a:solidFill>
-                          <a:latin typeface="Arial"/>
-                        </a:defRPr>
-                      </a:pPr>
-                      <a:r>
-                        <a:t>Evidence 4</a:t>
-                      </a:r>
-                    </a:p>
-                  </a:txBody>
-                  <a:tcPr marL="82296" marR="82296" marT="64008" marB="64008">
-                    <a:solidFill>
-                      <a:srgbClr val="F1F7F7"/>
-                    </a:solidFill>
-                  </a:tcPr>
-                </a:tc>
-                <a:tc>
-                  <a:txBody>
-                    <a:bodyPr wrap="none"/>
-                    <a:lstStyle/>
-                    <a:p>
-                      <a:pPr>
-                        <a:lnSpc>
-                          <a:spcPts val="1600"/>
-                        </a:lnSpc>
-                        <a:spcAft>
-                          <a:spcPts val="0"/>
-                        </a:spcAft>
-                        <a:defRPr sz="1200" b="0">
-                          <a:solidFill>
-                            <a:srgbClr val="21243A"/>
-                          </a:solidFill>
-                          <a:latin typeface="Arial"/>
-                        </a:defRPr>
-                      </a:pPr>
-                      <a:r>
-                        <a:t>Illustrated outlines and smooth shading throughout; no photographic base is</a:t>
-                      </a:r>
-                    </a:p>
-                    <a:p>
-                      <a:pPr>
-                        <a:lnSpc>
-                          <a:spcPts val="1600"/>
-                        </a:lnSpc>
-                        <a:spcAft>
-                          <a:spcPts val="0"/>
-                        </a:spcAft>
-                        <a:defRPr sz="1200" b="0">
-                          <a:solidFill>
-                            <a:srgbClr val="21243A"/>
-                          </a:solidFill>
-                          <a:latin typeface="Arial"/>
-                        </a:defRPr>
-                      </a:pPr>
-                      <a:r>
-                        <a:t>evident.</a:t>
-                      </a:r>
-                    </a:p>
-                  </a:txBody>
-                  <a:tcPr marL="82296" marR="82296" marT="64008" marB="64008">
-                    <a:solidFill>
-                      <a:srgbClr val="F1F7F7"/>
+              <a:tr h="349504">
+                <a:tc>
+                  <a:txBody>
+                    <a:bodyPr wrap="none"/>
+                    <a:lstStyle/>
+                    <a:p>
+                      <a:pPr>
+                        <a:lnSpc>
+                          <a:spcPts val="1600"/>
+                        </a:lnSpc>
+                        <a:spcAft>
+                          <a:spcPts val="0"/>
+                        </a:spcAft>
+                        <a:defRPr sz="1200" b="0">
+                          <a:solidFill>
+                            <a:srgbClr val="21243A"/>
+                          </a:solidFill>
+                          <a:latin typeface="Arial"/>
+                        </a:defRPr>
+                      </a:pPr>
+                      <a:r>
+                        <a:t>Evidence 3</a:t>
+                      </a:r>
+                    </a:p>
+                  </a:txBody>
+                  <a:tcPr marL="82296" marR="82296" marT="64008" marB="64008">
+                    <a:solidFill>
+                      <a:srgbClr val="FFFFFF"/>
+                    </a:solidFill>
+                  </a:tcPr>
+                </a:tc>
+                <a:tc>
+                  <a:txBody>
+                    <a:bodyPr wrap="none"/>
+                    <a:lstStyle/>
+                    <a:p>
+                      <a:pPr>
+                        <a:lnSpc>
+                          <a:spcPts val="1600"/>
+                        </a:lnSpc>
+                        <a:spcAft>
+                          <a:spcPts val="0"/>
+                        </a:spcAft>
+                        <a:defRPr sz="1200" b="0">
+                          <a:solidFill>
+                            <a:srgbClr val="21243A"/>
+                          </a:solidFill>
+                          <a:latin typeface="Arial"/>
+                        </a:defRPr>
+                      </a:pPr>
+                      <a:r>
+                        <a:t>Gesturing hands have uneven finger separation and merged-looking contours.</a:t>
+                      </a:r>
+                    </a:p>
+                  </a:txBody>
+                  <a:tcPr marL="82296" marR="82296" marT="64008" marB="64008">
+                    <a:solidFill>
+                      <a:srgbClr val="FFFFFF"/>
                     </a:solidFill>
                   </a:tcPr>
                 </a:tc>
@@ -20003,6 +19319,113 @@
                         </a:defRPr>
                       </a:pPr>
                       <a:r>
+                        <a:t>Evidence 4</a:t>
+                      </a:r>
+                    </a:p>
+                  </a:txBody>
+                  <a:tcPr marL="82296" marR="82296" marT="64008" marB="64008">
+                    <a:solidFill>
+                      <a:srgbClr val="F1F7F7"/>
+                    </a:solidFill>
+                  </a:tcPr>
+                </a:tc>
+                <a:tc>
+                  <a:txBody>
+                    <a:bodyPr wrap="none"/>
+                    <a:lstStyle/>
+                    <a:p>
+                      <a:pPr>
+                        <a:lnSpc>
+                          <a:spcPts val="1600"/>
+                        </a:lnSpc>
+                        <a:spcAft>
+                          <a:spcPts val="0"/>
+                        </a:spcAft>
+                        <a:defRPr sz="1200" b="0">
+                          <a:solidFill>
+                            <a:srgbClr val="21243A"/>
+                          </a:solidFill>
+                          <a:latin typeface="Arial"/>
+                        </a:defRPr>
+                      </a:pPr>
+                      <a:r>
+                        <a:t>Tablet garden has noticeably softer, less defined detail than the surrounding</a:t>
+                      </a:r>
+                    </a:p>
+                    <a:p>
+                      <a:pPr>
+                        <a:lnSpc>
+                          <a:spcPts val="1600"/>
+                        </a:lnSpc>
+                        <a:spcAft>
+                          <a:spcPts val="0"/>
+                        </a:spcAft>
+                        <a:defRPr sz="1200" b="0">
+                          <a:solidFill>
+                            <a:srgbClr val="21243A"/>
+                          </a:solidFill>
+                          <a:latin typeface="Arial"/>
+                        </a:defRPr>
+                      </a:pPr>
+                      <a:r>
+                        <a:t>outlined illustration.</a:t>
+                      </a:r>
+                    </a:p>
+                  </a:txBody>
+                  <a:tcPr marL="82296" marR="82296" marT="64008" marB="64008">
+                    <a:solidFill>
+                      <a:srgbClr val="F1F7F7"/>
+                    </a:solidFill>
+                  </a:tcPr>
+                </a:tc>
+              </a:tr>
+            </a:tbl>
+          </a:graphicData>
+        </a:graphic>
+      </p:graphicFrame>
+      <p:graphicFrame>
+        <p:nvGraphicFramePr>
+          <p:cNvPr id="10" name="Table 9"/>
+          <p:cNvGraphicFramePr>
+            <a:graphicFrameLocks noGrp="1"/>
+          </p:cNvGraphicFramePr>
+          <p:nvPr/>
+        </p:nvGraphicFramePr>
+        <p:xfrm>
+          <a:off x="365760" y="3155696"/>
+          <a:ext cx="8412479" cy="552704"/>
+        </p:xfrm>
+        <a:graphic>
+          <a:graphicData uri="http://schemas.openxmlformats.org/drawingml/2006/table">
+            <a:tbl>
+              <a:tblPr firstRow="1" bandRow="1">
+                <a:tableStyleId>{5C22544A-7EE6-4342-B048-85BDC9FD1C3A}</a:tableStyleId>
+              </a:tblPr>
+              <a:tblGrid>
+                <a:gridCol w="2271369"/>
+                <a:gridCol w="6141110"/>
+              </a:tblGrid>
+              <a:tr h="552704">
+                <a:tc>
+                  <a:txBody>
+                    <a:bodyPr wrap="none"/>
+                    <a:lstStyle/>
+                    <a:p>
+                      <a:pPr>
+                        <a:lnSpc>
+                          <a:spcPts val="1600"/>
+                        </a:lnSpc>
+                        <a:spcAft>
+                          <a:spcPts val="0"/>
+                        </a:spcAft>
+                        <a:defRPr sz="1200" b="0">
+                          <a:solidFill>
+                            <a:srgbClr val="21243A"/>
+                          </a:solidFill>
+                          <a:latin typeface="Arial"/>
+                        </a:defRPr>
+                      </a:pPr>
+                      <a:r>
                         <a:t>Evidence 5</a:t>
                       </a:r>
                     </a:p>
@@ -20033,26 +19456,26 @@
                         </a:defRPr>
                       </a:pPr>
                       <a:r>
-                        <a:t>Caveat: This is a stylized illustration; human-drawn or stock artwork can share</a:t>
-                      </a:r>
-                    </a:p>
-                    <a:p>
-                      <a:pPr>
-                        <a:lnSpc>
-                          <a:spcPts val="1600"/>
-                        </a:lnSpc>
-                        <a:spcAft>
-                          <a:spcPts val="0"/>
-                        </a:spcAft>
-                        <a:defRPr sz="1200" b="0">
-                          <a:solidFill>
-                            <a:srgbClr val="21243A"/>
-                          </a:solidFill>
-                          <a:latin typeface="Arial"/>
-                        </a:defRPr>
-                      </a:pPr>
-                      <a:r>
-                        <a:t>these irregularities, so source provenance should be checked.</a:t>
+                        <a:t>Caveat: This is a digital illustration, not a photograph; stylized drawing errors</a:t>
+                      </a:r>
+                    </a:p>
+                    <a:p>
+                      <a:pPr>
+                        <a:lnSpc>
+                          <a:spcPts val="1600"/>
+                        </a:lnSpc>
+                        <a:spcAft>
+                          <a:spcPts val="0"/>
+                        </a:spcAft>
+                        <a:defRPr sz="1200" b="0">
+                          <a:solidFill>
+                            <a:srgbClr val="21243A"/>
+                          </a:solidFill>
+                          <a:latin typeface="Arial"/>
+                        </a:defRPr>
+                      </a:pPr>
+                      <a:r>
+                        <a:t>alone cannot establish AI origin without provenance.</a:t>
                       </a:r>
                     </a:p>
                   </a:txBody>
@@ -20942,64 +20365,64 @@
                         </a:defRPr>
                       </a:pPr>
                       <a:r>
-                        <a:t>synthetic likelihood 72/100; tells: digital illustration style with hyper-clean lines,</a:t>
-                      </a:r>
-                    </a:p>
-                    <a:p>
-                      <a:pPr>
-                        <a:lnSpc>
-                          <a:spcPts val="1600"/>
-                        </a:lnSpc>
-                        <a:spcAft>
-                          <a:spcPts val="0"/>
-                        </a:spcAft>
-                        <a:defRPr sz="1200" b="0">
-                          <a:solidFill>
-                            <a:srgbClr val="21243A"/>
-                          </a:solidFill>
-                          <a:latin typeface="Arial"/>
-                        </a:defRPr>
-                      </a:pPr>
-                      <a:r>
-                        <a:t>typical diffusion model character rendering features, slight anatomical</a:t>
-                      </a:r>
-                    </a:p>
-                    <a:p>
-                      <a:pPr>
-                        <a:lnSpc>
-                          <a:spcPts val="1600"/>
-                        </a:lnSpc>
-                        <a:spcAft>
-                          <a:spcPts val="0"/>
-                        </a:spcAft>
-                        <a:defRPr sz="1200" b="0">
-                          <a:solidFill>
-                            <a:srgbClr val="21243A"/>
-                          </a:solidFill>
-                          <a:latin typeface="Arial"/>
-                        </a:defRPr>
-                      </a:pPr>
-                      <a:r>
-                        <a:t>inconsistencies in hands and fingers, unusual blending around tablet screen</a:t>
-                      </a:r>
-                    </a:p>
-                    <a:p>
-                      <a:pPr>
-                        <a:lnSpc>
-                          <a:spcPts val="1600"/>
-                        </a:lnSpc>
-                        <a:spcAft>
-                          <a:spcPts val="0"/>
-                        </a:spcAft>
-                        <a:defRPr sz="1200" b="0">
-                          <a:solidFill>
-                            <a:srgbClr val="21243A"/>
-                          </a:solidFill>
-                          <a:latin typeface="Arial"/>
-                        </a:defRPr>
-                      </a:pPr>
-                      <a:r>
-                        <a:t>integration</a:t>
+                        <a:t>synthetic likelihood 72/100; tells: stylized digital line art with subtle AI generative</a:t>
+                      </a:r>
+                    </a:p>
+                    <a:p>
+                      <a:pPr>
+                        <a:lnSpc>
+                          <a:spcPts val="1600"/>
+                        </a:lnSpc>
+                        <a:spcAft>
+                          <a:spcPts val="0"/>
+                        </a:spcAft>
+                        <a:defRPr sz="1200" b="0">
+                          <a:solidFill>
+                            <a:srgbClr val="21243A"/>
+                          </a:solidFill>
+                          <a:latin typeface="Arial"/>
+                        </a:defRPr>
+                      </a:pPr>
+                      <a:r>
+                        <a:t>markers, irregular finger proportions and geometry, overly smooth shading</a:t>
+                      </a:r>
+                    </a:p>
+                    <a:p>
+                      <a:pPr>
+                        <a:lnSpc>
+                          <a:spcPts val="1600"/>
+                        </a:lnSpc>
+                        <a:spcAft>
+                          <a:spcPts val="0"/>
+                        </a:spcAft>
+                        <a:defRPr sz="1200" b="0">
+                          <a:solidFill>
+                            <a:srgbClr val="21243A"/>
+                          </a:solidFill>
+                          <a:latin typeface="Arial"/>
+                        </a:defRPr>
+                      </a:pPr>
+                      <a:r>
+                        <a:t>gradients typical of generative models, inconsistent perspective on wheelchair</a:t>
+                      </a:r>
+                    </a:p>
+                    <a:p>
+                      <a:pPr>
+                        <a:lnSpc>
+                          <a:spcPts val="1600"/>
+                        </a:lnSpc>
+                        <a:spcAft>
+                          <a:spcPts val="0"/>
+                        </a:spcAft>
+                        <a:defRPr sz="1200" b="0">
+                          <a:solidFill>
+                            <a:srgbClr val="21243A"/>
+                          </a:solidFill>
+                          <a:latin typeface="Arial"/>
+                        </a:defRPr>
+                      </a:pPr>
+                      <a:r>
+                        <a:t>spokes</a:t>
                       </a:r>
                     </a:p>
                   </a:txBody>
@@ -21087,7 +20510,7 @@
                         </a:defRPr>
                       </a:pPr>
                       <a:r>
-                        <a:t>Digital illustration style with hyper-clean lines</a:t>
+                        <a:t>Stylized digital line art with subtle AI generative markers</a:t>
                       </a:r>
                     </a:p>
                   </a:txBody>
@@ -21175,7 +20598,7 @@
                         </a:defRPr>
                       </a:pPr>
                       <a:r>
-                        <a:t>Typical diffusion model character rendering features</a:t>
+                        <a:t>Irregular finger proportions and geometry</a:t>
                       </a:r>
                     </a:p>
                   </a:txBody>
@@ -21263,7 +20686,7 @@
                         </a:defRPr>
                       </a:pPr>
                       <a:r>
-                        <a:t>Slight anatomical inconsistencies in hands and fingers</a:t>
+                        <a:t>Overly smooth shading gradients typical of generative models</a:t>
                       </a:r>
                     </a:p>
                   </a:txBody>
@@ -21625,7 +21048,7 @@
                         </a:defRPr>
                       </a:pPr>
                       <a:r>
-                        <a:t>Unusual blending around tablet screen integration</a:t>
+                        <a:t>Inconsistent perspective on wheelchair spokes</a:t>
                       </a:r>
                     </a:p>
                   </a:txBody>
@@ -21650,7 +21073,7 @@
         </p:nvGraphicFramePr>
         <p:xfrm>
           <a:off x="365760" y="2050288"/>
-          <a:ext cx="8412479" cy="349504"/>
+          <a:ext cx="8412479" cy="552704"/>
         </p:xfrm>
         <a:graphic>
           <a:graphicData uri="http://schemas.openxmlformats.org/drawingml/2006/table">
@@ -21662,7 +21085,7 @@
                 <a:gridCol w="2271369"/>
                 <a:gridCol w="6141110"/>
               </a:tblGrid>
-              <a:tr h="349504">
+              <a:tr h="552704">
                 <a:tc>
                   <a:txBody>
                     <a:bodyPr wrap="none"/>
@@ -21713,7 +21136,26 @@
                         </a:defRPr>
                       </a:pPr>
                       <a:r>
-                        <a:t>Caveat: Vector or digital human art can closely mimic generative cartoon styles.</a:t>
+                        <a:t>Caveat: High-quality human digital vector/raster illustrations often closely</a:t>
+                      </a:r>
+                    </a:p>
+                    <a:p>
+                      <a:pPr>
+                        <a:lnSpc>
+                          <a:spcPts val="1600"/>
+                        </a:lnSpc>
+                        <a:spcAft>
+                          <a:spcPts val="0"/>
+                        </a:spcAft>
+                        <a:defRPr sz="1200" b="0">
+                          <a:solidFill>
+                            <a:srgbClr val="21243A"/>
+                          </a:solidFill>
+                          <a:latin typeface="Arial"/>
+                        </a:defRPr>
+                      </a:pPr>
+                      <a:r>
+                        <a:t>resemble generative 2D art styles.</a:t>
                       </a:r>
                     </a:p>
                   </a:txBody>

--- a/site/showcase/exports/illustration_1.pptx
+++ b/site/showcase/exports/illustration_1.pptx
@@ -22,6 +22,7 @@
     <p:sldId id="270" r:id="rId22"/>
     <p:sldId id="271" r:id="rId23"/>
     <p:sldId id="272" r:id="rId24"/>
+    <p:sldId id="273" r:id="rId25"/>
   </p:sldIdLst>
   <p:sldSz cx="9144000" cy="6858000" type="screen4x3"/>
   <p:notesSz cx="6858000" cy="9144000"/>
@@ -1559,6 +1560,101 @@
 </file>
 
 <file path=ppt/notesSlides/notesSlide17.xml><?xml version="1.0" encoding="utf-8"?>
+<p:notes xmlns:a="http://schemas.openxmlformats.org/drawingml/2006/main" xmlns:p="http://schemas.openxmlformats.org/presentationml/2006/main" xmlns:r="http://schemas.openxmlformats.org/officeDocument/2006/relationships">
+  <p:cSld>
+    <p:spTree>
+      <p:nvGrpSpPr>
+        <p:cNvPr id="1" name=""/>
+        <p:cNvGrpSpPr/>
+        <p:nvPr/>
+      </p:nvGrpSpPr>
+      <p:grpSpPr>
+        <a:xfrm>
+          <a:off x="0" y="0"/>
+          <a:ext cx="0" cy="0"/>
+          <a:chOff x="0" y="0"/>
+          <a:chExt cx="0" cy="0"/>
+        </a:xfrm>
+      </p:grpSpPr>
+      <p:sp>
+        <p:nvSpPr>
+          <p:cNvPr id="2" name="Slide Image Placeholder 1"/>
+          <p:cNvSpPr>
+            <a:spLocks noGrp="1"/>
+          </p:cNvSpPr>
+          <p:nvPr>
+            <p:ph type="sldImg" idx="2"/>
+          </p:nvPr>
+        </p:nvSpPr>
+        <p:spPr/>
+      </p:sp>
+      <p:sp>
+        <p:nvSpPr>
+          <p:cNvPr id="3" name="Notes Placeholder 2"/>
+          <p:cNvSpPr>
+            <a:spLocks noGrp="1"/>
+          </p:cNvSpPr>
+          <p:nvPr>
+            <p:ph type="body" idx="3" sz="quarter"/>
+          </p:nvPr>
+        </p:nvSpPr>
+        <p:spPr/>
+        <p:txBody>
+          <a:bodyPr/>
+          <a:lstStyle/>
+          <a:p>
+            <a:r>
+              <a:t>illustration-1.png</a:t>
+            </a:r>
+          </a:p>
+          <a:p>
+            <a:r>
+              <a:t>Cite this analysis</a:t>
+            </a:r>
+          </a:p>
+          <a:p>
+            <a:r>
+              <a:t>Software (Harvard) | Martin, S. (2026) SDA Vision: Synthetic-media Discourse Analysis (version 0.1.0) [Computer software]. Manchester Metropolitan University. Available at: https://sdavision.io/</a:t>
+            </a:r>
+          </a:p>
+          <a:p>
+            <a:r>
+              <a:t>Software creator | Dr Sam Martin, Smart Data Research UK (UKRI) Fellow, Manchester Metropolitan University (MMU). ORCID: https://orcid.org/0000-0002-4466-8374.</a:t>
+            </a:r>
+          </a:p>
+          <a:p>
+            <a:r>
+              <a:t>Funding acknowledgement | This work was supported by Smart Data Research UK, a UKRI investment; Grant number UKRI4010.</a:t>
+            </a:r>
+          </a:p>
+          <a:p>
+            <a:r>
+              <a:t>Analysis record | File: illustration-1.png; media type: image; recorded at: 2026-09-26T22:31:03+00:00; models: claude-opus-5-5, gemini-3.8-flash, gpt-6-astra.</a:t>
+            </a:r>
+          </a:p>
+        </p:txBody>
+      </p:sp>
+      <p:sp>
+        <p:nvSpPr>
+          <p:cNvPr id="4" name="Slide Number Placeholder 3"/>
+          <p:cNvSpPr>
+            <a:spLocks noGrp="1"/>
+          </p:cNvSpPr>
+          <p:nvPr>
+            <p:ph type="sldNum" idx="5" sz="quarter"/>
+          </p:nvPr>
+        </p:nvSpPr>
+        <p:spPr/>
+      </p:sp>
+    </p:spTree>
+  </p:cSld>
+  <p:clrMapOvr>
+    <a:masterClrMapping/>
+  </p:clrMapOvr>
+</p:notes>
+</file>
+
+<file path=ppt/notesSlides/notesSlide18.xml><?xml version="1.0" encoding="utf-8"?>
 <p:notes xmlns:a="http://schemas.openxmlformats.org/drawingml/2006/main" xmlns:p="http://schemas.openxmlformats.org/presentationml/2006/main" xmlns:r="http://schemas.openxmlformats.org/officeDocument/2006/relationships">
   <p:cSld>
     <p:spTree>
@@ -12403,7 +12499,7 @@
               </a:defRPr>
             </a:pPr>
             <a:r>
-              <a:t>File and analysis record</a:t>
+              <a:t>Cite this analysis</a:t>
             </a:r>
           </a:p>
         </p:txBody>
@@ -12488,6 +12584,746 @@
             </a:pPr>
             <a:r>
               <a:t>17</a:t>
+            </a:r>
+          </a:p>
+        </p:txBody>
+      </p:sp>
+      <p:graphicFrame>
+        <p:nvGraphicFramePr>
+          <p:cNvPr id="6" name="Table 5"/>
+          <p:cNvGraphicFramePr>
+            <a:graphicFrameLocks noGrp="1"/>
+          </p:cNvGraphicFramePr>
+          <p:nvPr/>
+        </p:nvGraphicFramePr>
+        <p:xfrm>
+          <a:off x="365760" y="1353312"/>
+          <a:ext cx="8412479" cy="347472"/>
+        </p:xfrm>
+        <a:graphic>
+          <a:graphicData uri="http://schemas.openxmlformats.org/drawingml/2006/table">
+            <a:tbl>
+              <a:tblPr firstRow="1" bandRow="1">
+                <a:tableStyleId>{5C22544A-7EE6-4342-B048-85BDC9FD1C3A}</a:tableStyleId>
+              </a:tblPr>
+              <a:tblGrid>
+                <a:gridCol w="2271369"/>
+                <a:gridCol w="6141110"/>
+              </a:tblGrid>
+              <a:tr h="347472">
+                <a:tc>
+                  <a:txBody>
+                    <a:bodyPr wrap="none"/>
+                    <a:lstStyle/>
+                    <a:p>
+                      <a:pPr>
+                        <a:lnSpc>
+                          <a:spcPts val="1600"/>
+                        </a:lnSpc>
+                        <a:spcAft>
+                          <a:spcPts val="0"/>
+                        </a:spcAft>
+                        <a:defRPr sz="1200" b="1">
+                          <a:solidFill>
+                            <a:srgbClr val="FFFFFF"/>
+                          </a:solidFill>
+                          <a:latin typeface="Arial"/>
+                        </a:defRPr>
+                      </a:pPr>
+                      <a:r>
+                        <a:t>Field</a:t>
+                      </a:r>
+                    </a:p>
+                  </a:txBody>
+                  <a:tcPr marL="82296" marR="82296" marT="64008" marB="64008">
+                    <a:solidFill>
+                      <a:srgbClr val="16787C"/>
+                    </a:solidFill>
+                  </a:tcPr>
+                </a:tc>
+                <a:tc>
+                  <a:txBody>
+                    <a:bodyPr wrap="none"/>
+                    <a:lstStyle/>
+                    <a:p>
+                      <a:pPr>
+                        <a:lnSpc>
+                          <a:spcPts val="1600"/>
+                        </a:lnSpc>
+                        <a:spcAft>
+                          <a:spcPts val="0"/>
+                        </a:spcAft>
+                        <a:defRPr sz="1200" b="1">
+                          <a:solidFill>
+                            <a:srgbClr val="FFFFFF"/>
+                          </a:solidFill>
+                          <a:latin typeface="Arial"/>
+                        </a:defRPr>
+                      </a:pPr>
+                      <a:r>
+                        <a:t>Recorded detail</a:t>
+                      </a:r>
+                    </a:p>
+                  </a:txBody>
+                  <a:tcPr marL="82296" marR="82296" marT="64008" marB="64008">
+                    <a:solidFill>
+                      <a:srgbClr val="16787C"/>
+                    </a:solidFill>
+                  </a:tcPr>
+                </a:tc>
+              </a:tr>
+            </a:tbl>
+          </a:graphicData>
+        </a:graphic>
+      </p:graphicFrame>
+      <p:graphicFrame>
+        <p:nvGraphicFramePr>
+          <p:cNvPr id="7" name="Table 6"/>
+          <p:cNvGraphicFramePr>
+            <a:graphicFrameLocks noGrp="1"/>
+          </p:cNvGraphicFramePr>
+          <p:nvPr/>
+        </p:nvGraphicFramePr>
+        <p:xfrm>
+          <a:off x="365760" y="1700784"/>
+          <a:ext cx="8412479" cy="755904"/>
+        </p:xfrm>
+        <a:graphic>
+          <a:graphicData uri="http://schemas.openxmlformats.org/drawingml/2006/table">
+            <a:tbl>
+              <a:tblPr firstRow="1" bandRow="1">
+                <a:tableStyleId>{5C22544A-7EE6-4342-B048-85BDC9FD1C3A}</a:tableStyleId>
+              </a:tblPr>
+              <a:tblGrid>
+                <a:gridCol w="2271369"/>
+                <a:gridCol w="6141110"/>
+              </a:tblGrid>
+              <a:tr h="755904">
+                <a:tc>
+                  <a:txBody>
+                    <a:bodyPr wrap="none"/>
+                    <a:lstStyle/>
+                    <a:p>
+                      <a:pPr>
+                        <a:lnSpc>
+                          <a:spcPts val="1600"/>
+                        </a:lnSpc>
+                        <a:spcAft>
+                          <a:spcPts val="0"/>
+                        </a:spcAft>
+                        <a:defRPr sz="1200" b="0">
+                          <a:solidFill>
+                            <a:srgbClr val="21243A"/>
+                          </a:solidFill>
+                          <a:latin typeface="Arial"/>
+                        </a:defRPr>
+                      </a:pPr>
+                      <a:r>
+                        <a:t>Software (Harvard)</a:t>
+                      </a:r>
+                    </a:p>
+                  </a:txBody>
+                  <a:tcPr marL="82296" marR="82296" marT="64008" marB="64008">
+                    <a:solidFill>
+                      <a:srgbClr val="F1F7F7"/>
+                    </a:solidFill>
+                  </a:tcPr>
+                </a:tc>
+                <a:tc>
+                  <a:txBody>
+                    <a:bodyPr wrap="none"/>
+                    <a:lstStyle/>
+                    <a:p>
+                      <a:pPr>
+                        <a:lnSpc>
+                          <a:spcPts val="1600"/>
+                        </a:lnSpc>
+                        <a:spcAft>
+                          <a:spcPts val="0"/>
+                        </a:spcAft>
+                        <a:defRPr sz="1200" b="0">
+                          <a:solidFill>
+                            <a:srgbClr val="21243A"/>
+                          </a:solidFill>
+                          <a:latin typeface="Arial"/>
+                        </a:defRPr>
+                      </a:pPr>
+                      <a:r>
+                        <a:t>Martin, S. (2026) SDA Vision: Synthetic-media Discourse Analysis (version 0.1.0)</a:t>
+                      </a:r>
+                    </a:p>
+                    <a:p>
+                      <a:pPr>
+                        <a:lnSpc>
+                          <a:spcPts val="1600"/>
+                        </a:lnSpc>
+                        <a:spcAft>
+                          <a:spcPts val="0"/>
+                        </a:spcAft>
+                        <a:defRPr sz="1200" b="0">
+                          <a:solidFill>
+                            <a:srgbClr val="21243A"/>
+                          </a:solidFill>
+                          <a:latin typeface="Arial"/>
+                        </a:defRPr>
+                      </a:pPr>
+                      <a:r>
+                        <a:t>[Computer software]. Manchester Metropolitan University. Available at:</a:t>
+                      </a:r>
+                    </a:p>
+                    <a:p>
+                      <a:pPr>
+                        <a:lnSpc>
+                          <a:spcPts val="1600"/>
+                        </a:lnSpc>
+                        <a:spcAft>
+                          <a:spcPts val="0"/>
+                        </a:spcAft>
+                        <a:defRPr sz="1200" b="0">
+                          <a:solidFill>
+                            <a:srgbClr val="21243A"/>
+                          </a:solidFill>
+                          <a:latin typeface="Arial"/>
+                        </a:defRPr>
+                      </a:pPr>
+                      <a:r>
+                        <a:t>https://sdavision.io/</a:t>
+                      </a:r>
+                    </a:p>
+                  </a:txBody>
+                  <a:tcPr marL="82296" marR="82296" marT="64008" marB="64008">
+                    <a:solidFill>
+                      <a:srgbClr val="F1F7F7"/>
+                    </a:solidFill>
+                  </a:tcPr>
+                </a:tc>
+              </a:tr>
+            </a:tbl>
+          </a:graphicData>
+        </a:graphic>
+      </p:graphicFrame>
+      <p:graphicFrame>
+        <p:nvGraphicFramePr>
+          <p:cNvPr id="8" name="Table 7"/>
+          <p:cNvGraphicFramePr>
+            <a:graphicFrameLocks noGrp="1"/>
+          </p:cNvGraphicFramePr>
+          <p:nvPr/>
+        </p:nvGraphicFramePr>
+        <p:xfrm>
+          <a:off x="365760" y="2456688"/>
+          <a:ext cx="8412479" cy="552704"/>
+        </p:xfrm>
+        <a:graphic>
+          <a:graphicData uri="http://schemas.openxmlformats.org/drawingml/2006/table">
+            <a:tbl>
+              <a:tblPr firstRow="1" bandRow="1">
+                <a:tableStyleId>{5C22544A-7EE6-4342-B048-85BDC9FD1C3A}</a:tableStyleId>
+              </a:tblPr>
+              <a:tblGrid>
+                <a:gridCol w="2271369"/>
+                <a:gridCol w="6141110"/>
+              </a:tblGrid>
+              <a:tr h="552704">
+                <a:tc>
+                  <a:txBody>
+                    <a:bodyPr wrap="none"/>
+                    <a:lstStyle/>
+                    <a:p>
+                      <a:pPr>
+                        <a:lnSpc>
+                          <a:spcPts val="1600"/>
+                        </a:lnSpc>
+                        <a:spcAft>
+                          <a:spcPts val="0"/>
+                        </a:spcAft>
+                        <a:defRPr sz="1200" b="0">
+                          <a:solidFill>
+                            <a:srgbClr val="21243A"/>
+                          </a:solidFill>
+                          <a:latin typeface="Arial"/>
+                        </a:defRPr>
+                      </a:pPr>
+                      <a:r>
+                        <a:t>Software creator</a:t>
+                      </a:r>
+                    </a:p>
+                  </a:txBody>
+                  <a:tcPr marL="82296" marR="82296" marT="64008" marB="64008">
+                    <a:solidFill>
+                      <a:srgbClr val="FFFFFF"/>
+                    </a:solidFill>
+                  </a:tcPr>
+                </a:tc>
+                <a:tc>
+                  <a:txBody>
+                    <a:bodyPr wrap="none"/>
+                    <a:lstStyle/>
+                    <a:p>
+                      <a:pPr>
+                        <a:lnSpc>
+                          <a:spcPts val="1600"/>
+                        </a:lnSpc>
+                        <a:spcAft>
+                          <a:spcPts val="0"/>
+                        </a:spcAft>
+                        <a:defRPr sz="1200" b="0">
+                          <a:solidFill>
+                            <a:srgbClr val="21243A"/>
+                          </a:solidFill>
+                          <a:latin typeface="Arial"/>
+                        </a:defRPr>
+                      </a:pPr>
+                      <a:r>
+                        <a:t>Dr Sam Martin, Smart Data Research UK (UKRI) Fellow, Manchester Metropolitan</a:t>
+                      </a:r>
+                    </a:p>
+                    <a:p>
+                      <a:pPr>
+                        <a:lnSpc>
+                          <a:spcPts val="1600"/>
+                        </a:lnSpc>
+                        <a:spcAft>
+                          <a:spcPts val="0"/>
+                        </a:spcAft>
+                        <a:defRPr sz="1200" b="0">
+                          <a:solidFill>
+                            <a:srgbClr val="21243A"/>
+                          </a:solidFill>
+                          <a:latin typeface="Arial"/>
+                        </a:defRPr>
+                      </a:pPr>
+                      <a:r>
+                        <a:t>University (MMU). ORCID: https://orcid.org/0000-0002-4466-8374.</a:t>
+                      </a:r>
+                    </a:p>
+                  </a:txBody>
+                  <a:tcPr marL="82296" marR="82296" marT="64008" marB="64008">
+                    <a:solidFill>
+                      <a:srgbClr val="FFFFFF"/>
+                    </a:solidFill>
+                  </a:tcPr>
+                </a:tc>
+              </a:tr>
+            </a:tbl>
+          </a:graphicData>
+        </a:graphic>
+      </p:graphicFrame>
+      <p:graphicFrame>
+        <p:nvGraphicFramePr>
+          <p:cNvPr id="9" name="Table 8"/>
+          <p:cNvGraphicFramePr>
+            <a:graphicFrameLocks noGrp="1"/>
+          </p:cNvGraphicFramePr>
+          <p:nvPr/>
+        </p:nvGraphicFramePr>
+        <p:xfrm>
+          <a:off x="365760" y="3009392"/>
+          <a:ext cx="8412479" cy="552704"/>
+        </p:xfrm>
+        <a:graphic>
+          <a:graphicData uri="http://schemas.openxmlformats.org/drawingml/2006/table">
+            <a:tbl>
+              <a:tblPr firstRow="1" bandRow="1">
+                <a:tableStyleId>{5C22544A-7EE6-4342-B048-85BDC9FD1C3A}</a:tableStyleId>
+              </a:tblPr>
+              <a:tblGrid>
+                <a:gridCol w="2271369"/>
+                <a:gridCol w="6141110"/>
+              </a:tblGrid>
+              <a:tr h="552704">
+                <a:tc>
+                  <a:txBody>
+                    <a:bodyPr wrap="none"/>
+                    <a:lstStyle/>
+                    <a:p>
+                      <a:pPr>
+                        <a:lnSpc>
+                          <a:spcPts val="1600"/>
+                        </a:lnSpc>
+                        <a:spcAft>
+                          <a:spcPts val="0"/>
+                        </a:spcAft>
+                        <a:defRPr sz="1200" b="0">
+                          <a:solidFill>
+                            <a:srgbClr val="21243A"/>
+                          </a:solidFill>
+                          <a:latin typeface="Arial"/>
+                        </a:defRPr>
+                      </a:pPr>
+                      <a:r>
+                        <a:t>Funding acknowledgement</a:t>
+                      </a:r>
+                    </a:p>
+                  </a:txBody>
+                  <a:tcPr marL="82296" marR="82296" marT="64008" marB="64008">
+                    <a:solidFill>
+                      <a:srgbClr val="F1F7F7"/>
+                    </a:solidFill>
+                  </a:tcPr>
+                </a:tc>
+                <a:tc>
+                  <a:txBody>
+                    <a:bodyPr wrap="none"/>
+                    <a:lstStyle/>
+                    <a:p>
+                      <a:pPr>
+                        <a:lnSpc>
+                          <a:spcPts val="1600"/>
+                        </a:lnSpc>
+                        <a:spcAft>
+                          <a:spcPts val="0"/>
+                        </a:spcAft>
+                        <a:defRPr sz="1200" b="0">
+                          <a:solidFill>
+                            <a:srgbClr val="21243A"/>
+                          </a:solidFill>
+                          <a:latin typeface="Arial"/>
+                        </a:defRPr>
+                      </a:pPr>
+                      <a:r>
+                        <a:t>This work was supported by Smart Data Research UK, a UKRI investment; Grant</a:t>
+                      </a:r>
+                    </a:p>
+                    <a:p>
+                      <a:pPr>
+                        <a:lnSpc>
+                          <a:spcPts val="1600"/>
+                        </a:lnSpc>
+                        <a:spcAft>
+                          <a:spcPts val="0"/>
+                        </a:spcAft>
+                        <a:defRPr sz="1200" b="0">
+                          <a:solidFill>
+                            <a:srgbClr val="21243A"/>
+                          </a:solidFill>
+                          <a:latin typeface="Arial"/>
+                        </a:defRPr>
+                      </a:pPr>
+                      <a:r>
+                        <a:t>number UKRI4010.</a:t>
+                      </a:r>
+                    </a:p>
+                  </a:txBody>
+                  <a:tcPr marL="82296" marR="82296" marT="64008" marB="64008">
+                    <a:solidFill>
+                      <a:srgbClr val="F1F7F7"/>
+                    </a:solidFill>
+                  </a:tcPr>
+                </a:tc>
+              </a:tr>
+            </a:tbl>
+          </a:graphicData>
+        </a:graphic>
+      </p:graphicFrame>
+      <p:graphicFrame>
+        <p:nvGraphicFramePr>
+          <p:cNvPr id="10" name="Table 9"/>
+          <p:cNvGraphicFramePr>
+            <a:graphicFrameLocks noGrp="1"/>
+          </p:cNvGraphicFramePr>
+          <p:nvPr/>
+        </p:nvGraphicFramePr>
+        <p:xfrm>
+          <a:off x="365760" y="3562095"/>
+          <a:ext cx="8412479" cy="755904"/>
+        </p:xfrm>
+        <a:graphic>
+          <a:graphicData uri="http://schemas.openxmlformats.org/drawingml/2006/table">
+            <a:tbl>
+              <a:tblPr firstRow="1" bandRow="1">
+                <a:tableStyleId>{5C22544A-7EE6-4342-B048-85BDC9FD1C3A}</a:tableStyleId>
+              </a:tblPr>
+              <a:tblGrid>
+                <a:gridCol w="2271369"/>
+                <a:gridCol w="6141110"/>
+              </a:tblGrid>
+              <a:tr h="755904">
+                <a:tc>
+                  <a:txBody>
+                    <a:bodyPr wrap="none"/>
+                    <a:lstStyle/>
+                    <a:p>
+                      <a:pPr>
+                        <a:lnSpc>
+                          <a:spcPts val="1600"/>
+                        </a:lnSpc>
+                        <a:spcAft>
+                          <a:spcPts val="0"/>
+                        </a:spcAft>
+                        <a:defRPr sz="1200" b="0">
+                          <a:solidFill>
+                            <a:srgbClr val="21243A"/>
+                          </a:solidFill>
+                          <a:latin typeface="Arial"/>
+                        </a:defRPr>
+                      </a:pPr>
+                      <a:r>
+                        <a:t>Analysis record</a:t>
+                      </a:r>
+                    </a:p>
+                  </a:txBody>
+                  <a:tcPr marL="82296" marR="82296" marT="64008" marB="64008">
+                    <a:solidFill>
+                      <a:srgbClr val="FFFFFF"/>
+                    </a:solidFill>
+                  </a:tcPr>
+                </a:tc>
+                <a:tc>
+                  <a:txBody>
+                    <a:bodyPr wrap="none"/>
+                    <a:lstStyle/>
+                    <a:p>
+                      <a:pPr>
+                        <a:lnSpc>
+                          <a:spcPts val="1600"/>
+                        </a:lnSpc>
+                        <a:spcAft>
+                          <a:spcPts val="0"/>
+                        </a:spcAft>
+                        <a:defRPr sz="1200" b="0">
+                          <a:solidFill>
+                            <a:srgbClr val="21243A"/>
+                          </a:solidFill>
+                          <a:latin typeface="Arial"/>
+                        </a:defRPr>
+                      </a:pPr>
+                      <a:r>
+                        <a:t>File: illustration-1.png; media type: image; recorded at:</a:t>
+                      </a:r>
+                    </a:p>
+                    <a:p>
+                      <a:pPr>
+                        <a:lnSpc>
+                          <a:spcPts val="1600"/>
+                        </a:lnSpc>
+                        <a:spcAft>
+                          <a:spcPts val="0"/>
+                        </a:spcAft>
+                        <a:defRPr sz="1200" b="0">
+                          <a:solidFill>
+                            <a:srgbClr val="21243A"/>
+                          </a:solidFill>
+                          <a:latin typeface="Arial"/>
+                        </a:defRPr>
+                      </a:pPr>
+                      <a:r>
+                        <a:t>2026-09-26T22:31:03+00:00; models: claude-opus-5-5, gemini-3.8-flash,</a:t>
+                      </a:r>
+                    </a:p>
+                    <a:p>
+                      <a:pPr>
+                        <a:lnSpc>
+                          <a:spcPts val="1600"/>
+                        </a:lnSpc>
+                        <a:spcAft>
+                          <a:spcPts val="0"/>
+                        </a:spcAft>
+                        <a:defRPr sz="1200" b="0">
+                          <a:solidFill>
+                            <a:srgbClr val="21243A"/>
+                          </a:solidFill>
+                          <a:latin typeface="Arial"/>
+                        </a:defRPr>
+                      </a:pPr>
+                      <a:r>
+                        <a:t>gpt-6-astra.</a:t>
+                      </a:r>
+                    </a:p>
+                  </a:txBody>
+                  <a:tcPr marL="82296" marR="82296" marT="64008" marB="64008">
+                    <a:solidFill>
+                      <a:srgbClr val="FFFFFF"/>
+                    </a:solidFill>
+                  </a:tcPr>
+                </a:tc>
+              </a:tr>
+            </a:tbl>
+          </a:graphicData>
+        </a:graphic>
+      </p:graphicFrame>
+    </p:spTree>
+  </p:cSld>
+  <p:clrMapOvr>
+    <a:masterClrMapping/>
+  </p:clrMapOvr>
+</p:sld>
+</file>
+
+<file path=ppt/slides/slide18.xml><?xml version="1.0" encoding="utf-8"?>
+<p:sld xmlns:a="http://schemas.openxmlformats.org/drawingml/2006/main" xmlns:p="http://schemas.openxmlformats.org/presentationml/2006/main" xmlns:r="http://schemas.openxmlformats.org/officeDocument/2006/relationships">
+  <p:cSld>
+    <p:spTree>
+      <p:nvGrpSpPr>
+        <p:cNvPr id="1" name=""/>
+        <p:cNvGrpSpPr/>
+        <p:nvPr/>
+      </p:nvGrpSpPr>
+      <p:grpSpPr/>
+      <p:sp>
+        <p:nvSpPr>
+          <p:cNvPr id="2" name="TextBox 1"/>
+          <p:cNvSpPr txBox="1"/>
+          <p:nvPr/>
+        </p:nvSpPr>
+        <p:spPr>
+          <a:xfrm>
+            <a:off x="365760" y="219456"/>
+            <a:ext cx="8412480" cy="228600"/>
+          </a:xfrm>
+          <a:prstGeom prst="rect">
+            <a:avLst/>
+          </a:prstGeom>
+          <a:noFill/>
+        </p:spPr>
+        <p:txBody>
+          <a:bodyPr wrap="square" lIns="0" rIns="0" tIns="0" bIns="0">
+            <a:spAutoFit/>
+          </a:bodyPr>
+          <a:lstStyle/>
+          <a:p>
+            <a:pPr>
+              <a:lnSpc>
+                <a:spcPct val="115000"/>
+              </a:lnSpc>
+              <a:spcAft>
+                <a:spcPts val="0"/>
+              </a:spcAft>
+              <a:defRPr sz="1100" b="1">
+                <a:solidFill>
+                  <a:srgbClr val="C5006A"/>
+                </a:solidFill>
+                <a:latin typeface="Arial"/>
+              </a:defRPr>
+            </a:pPr>
+            <a:r>
+              <a:t>SDA VISION / RESEARCH REPORT</a:t>
+            </a:r>
+          </a:p>
+        </p:txBody>
+      </p:sp>
+      <p:sp>
+        <p:nvSpPr>
+          <p:cNvPr id="3" name="TextBox 2"/>
+          <p:cNvSpPr txBox="1"/>
+          <p:nvPr/>
+        </p:nvSpPr>
+        <p:spPr>
+          <a:xfrm>
+            <a:off x="365760" y="658368"/>
+            <a:ext cx="8412480" cy="612648"/>
+          </a:xfrm>
+          <a:prstGeom prst="rect">
+            <a:avLst/>
+          </a:prstGeom>
+          <a:noFill/>
+        </p:spPr>
+        <p:txBody>
+          <a:bodyPr wrap="square" lIns="0" rIns="0" tIns="0" bIns="0">
+            <a:spAutoFit/>
+          </a:bodyPr>
+          <a:lstStyle/>
+          <a:p>
+            <a:pPr>
+              <a:lnSpc>
+                <a:spcPct val="115000"/>
+              </a:lnSpc>
+              <a:spcAft>
+                <a:spcPts val="0"/>
+              </a:spcAft>
+              <a:defRPr sz="2200" b="1">
+                <a:solidFill>
+                  <a:srgbClr val="21243A"/>
+                </a:solidFill>
+                <a:latin typeface="Arial"/>
+              </a:defRPr>
+            </a:pPr>
+            <a:r>
+              <a:t>File and analysis record</a:t>
+            </a:r>
+          </a:p>
+        </p:txBody>
+      </p:sp>
+      <p:sp>
+        <p:nvSpPr>
+          <p:cNvPr id="4" name="TextBox 3"/>
+          <p:cNvSpPr txBox="1"/>
+          <p:nvPr/>
+        </p:nvSpPr>
+        <p:spPr>
+          <a:xfrm>
+            <a:off x="365760" y="6291072"/>
+            <a:ext cx="8001000" cy="365760"/>
+          </a:xfrm>
+          <a:prstGeom prst="rect">
+            <a:avLst/>
+          </a:prstGeom>
+          <a:noFill/>
+        </p:spPr>
+        <p:txBody>
+          <a:bodyPr wrap="square" lIns="0" rIns="0" tIns="0" bIns="0">
+            <a:spAutoFit/>
+          </a:bodyPr>
+          <a:lstStyle/>
+          <a:p>
+            <a:pPr>
+              <a:lnSpc>
+                <a:spcPct val="115000"/>
+              </a:lnSpc>
+              <a:spcAft>
+                <a:spcPts val="0"/>
+              </a:spcAft>
+              <a:defRPr sz="800" b="0">
+                <a:solidFill>
+                  <a:srgbClr val="545B6D"/>
+                </a:solidFill>
+                <a:latin typeface="Arial"/>
+              </a:defRPr>
+            </a:pPr>
+            <a:r>
+              <a:t>Research assessment. Ratings are not calibrated probabilities.</a:t>
+            </a:r>
+          </a:p>
+        </p:txBody>
+      </p:sp>
+      <p:sp>
+        <p:nvSpPr>
+          <p:cNvPr id="5" name="TextBox 4"/>
+          <p:cNvSpPr txBox="1"/>
+          <p:nvPr/>
+        </p:nvSpPr>
+        <p:spPr>
+          <a:xfrm>
+            <a:off x="8394192" y="6318504"/>
+            <a:ext cx="365760" cy="228600"/>
+          </a:xfrm>
+          <a:prstGeom prst="rect">
+            <a:avLst/>
+          </a:prstGeom>
+          <a:noFill/>
+        </p:spPr>
+        <p:txBody>
+          <a:bodyPr wrap="square" lIns="0" rIns="0" tIns="0" bIns="0">
+            <a:spAutoFit/>
+          </a:bodyPr>
+          <a:lstStyle/>
+          <a:p>
+            <a:pPr>
+              <a:lnSpc>
+                <a:spcPct val="115000"/>
+              </a:lnSpc>
+              <a:spcAft>
+                <a:spcPts val="0"/>
+              </a:spcAft>
+              <a:defRPr sz="900" b="0">
+                <a:solidFill>
+                  <a:srgbClr val="545B6D"/>
+                </a:solidFill>
+                <a:latin typeface="Arial"/>
+              </a:defRPr>
+            </a:pPr>
+            <a:r>
+              <a:t>18</a:t>
             </a:r>
           </a:p>
         </p:txBody>

--- a/site/showcase/exports/illustration_1.pptx
+++ b/site/showcase/exports/illustration_1.pptx
@@ -1614,7 +1614,7 @@
           </a:p>
           <a:p>
             <a:r>
-              <a:t>Software (Harvard) | Martin, S. (2026) SDA Vision: Synthetic-media Discourse Analysis (version 0.1.0) [Computer software]. Manchester Metropolitan University. Available at: https://sdavision.io/</a:t>
+              <a:t>Software citation | Martin, S. (2026) SDA Vision: Synthetic-media Discourse Analysis (version 0.1.0) [Computer software]. Manchester Metropolitan University. Available at: https://sdavision.io/</a:t>
             </a:r>
           </a:p>
           <a:p>
@@ -12719,7 +12719,7 @@
                         </a:defRPr>
                       </a:pPr>
                       <a:r>
-                        <a:t>Software (Harvard)</a:t>
+                        <a:t>Software citation</a:t>
                       </a:r>
                     </a:p>
                   </a:txBody>

--- a/site/showcase/exports/illustration_1.pptx
+++ b/site/showcase/exports/illustration_1.pptx
@@ -22,7 +22,6 @@
     <p:sldId id="270" r:id="rId22"/>
     <p:sldId id="271" r:id="rId23"/>
     <p:sldId id="272" r:id="rId24"/>
-    <p:sldId id="273" r:id="rId25"/>
   </p:sldIdLst>
   <p:sldSz cx="9144000" cy="6858000" type="screen4x3"/>
   <p:notesSz cx="6858000" cy="9144000"/>
@@ -1560,101 +1559,6 @@
 </file>
 
 <file path=ppt/notesSlides/notesSlide17.xml><?xml version="1.0" encoding="utf-8"?>
-<p:notes xmlns:a="http://schemas.openxmlformats.org/drawingml/2006/main" xmlns:p="http://schemas.openxmlformats.org/presentationml/2006/main" xmlns:r="http://schemas.openxmlformats.org/officeDocument/2006/relationships">
-  <p:cSld>
-    <p:spTree>
-      <p:nvGrpSpPr>
-        <p:cNvPr id="1" name=""/>
-        <p:cNvGrpSpPr/>
-        <p:nvPr/>
-      </p:nvGrpSpPr>
-      <p:grpSpPr>
-        <a:xfrm>
-          <a:off x="0" y="0"/>
-          <a:ext cx="0" cy="0"/>
-          <a:chOff x="0" y="0"/>
-          <a:chExt cx="0" cy="0"/>
-        </a:xfrm>
-      </p:grpSpPr>
-      <p:sp>
-        <p:nvSpPr>
-          <p:cNvPr id="2" name="Slide Image Placeholder 1"/>
-          <p:cNvSpPr>
-            <a:spLocks noGrp="1"/>
-          </p:cNvSpPr>
-          <p:nvPr>
-            <p:ph type="sldImg" idx="2"/>
-          </p:nvPr>
-        </p:nvSpPr>
-        <p:spPr/>
-      </p:sp>
-      <p:sp>
-        <p:nvSpPr>
-          <p:cNvPr id="3" name="Notes Placeholder 2"/>
-          <p:cNvSpPr>
-            <a:spLocks noGrp="1"/>
-          </p:cNvSpPr>
-          <p:nvPr>
-            <p:ph type="body" idx="3" sz="quarter"/>
-          </p:nvPr>
-        </p:nvSpPr>
-        <p:spPr/>
-        <p:txBody>
-          <a:bodyPr/>
-          <a:lstStyle/>
-          <a:p>
-            <a:r>
-              <a:t>illustration-1.png</a:t>
-            </a:r>
-          </a:p>
-          <a:p>
-            <a:r>
-              <a:t>Cite this analysis</a:t>
-            </a:r>
-          </a:p>
-          <a:p>
-            <a:r>
-              <a:t>Software citation | Martin, S. (2026) SDA Vision: Synthetic-media Discourse Analysis (version 0.1.0) [Computer software]. Manchester Metropolitan University. Available at: https://sdavision.io/</a:t>
-            </a:r>
-          </a:p>
-          <a:p>
-            <a:r>
-              <a:t>Software creator | Dr Sam Martin, Smart Data Research UK (UKRI) Fellow, Manchester Metropolitan University (MMU). ORCID: https://orcid.org/0000-0002-4466-8374.</a:t>
-            </a:r>
-          </a:p>
-          <a:p>
-            <a:r>
-              <a:t>Funding acknowledgement | This work was supported by Smart Data Research UK, a UKRI investment; Grant number UKRI4010.</a:t>
-            </a:r>
-          </a:p>
-          <a:p>
-            <a:r>
-              <a:t>Analysis record | File: illustration-1.png; media type: image; recorded at: 2026-09-26T22:31:03+00:00; models: claude-opus-5-5, gemini-3.8-flash, gpt-6-astra.</a:t>
-            </a:r>
-          </a:p>
-        </p:txBody>
-      </p:sp>
-      <p:sp>
-        <p:nvSpPr>
-          <p:cNvPr id="4" name="Slide Number Placeholder 3"/>
-          <p:cNvSpPr>
-            <a:spLocks noGrp="1"/>
-          </p:cNvSpPr>
-          <p:nvPr>
-            <p:ph type="sldNum" idx="5" sz="quarter"/>
-          </p:nvPr>
-        </p:nvSpPr>
-        <p:spPr/>
-      </p:sp>
-    </p:spTree>
-  </p:cSld>
-  <p:clrMapOvr>
-    <a:masterClrMapping/>
-  </p:clrMapOvr>
-</p:notes>
-</file>
-
-<file path=ppt/notesSlides/notesSlide18.xml><?xml version="1.0" encoding="utf-8"?>
 <p:notes xmlns:a="http://schemas.openxmlformats.org/drawingml/2006/main" xmlns:p="http://schemas.openxmlformats.org/presentationml/2006/main" xmlns:r="http://schemas.openxmlformats.org/officeDocument/2006/relationships">
   <p:cSld>
     <p:spTree>
@@ -12499,7 +12403,7 @@
               </a:defRPr>
             </a:pPr>
             <a:r>
-              <a:t>Cite this analysis</a:t>
+              <a:t>File and analysis record</a:t>
             </a:r>
           </a:p>
         </p:txBody>
@@ -12584,746 +12488,6 @@
             </a:pPr>
             <a:r>
               <a:t>17</a:t>
-            </a:r>
-          </a:p>
-        </p:txBody>
-      </p:sp>
-      <p:graphicFrame>
-        <p:nvGraphicFramePr>
-          <p:cNvPr id="6" name="Table 5"/>
-          <p:cNvGraphicFramePr>
-            <a:graphicFrameLocks noGrp="1"/>
-          </p:cNvGraphicFramePr>
-          <p:nvPr/>
-        </p:nvGraphicFramePr>
-        <p:xfrm>
-          <a:off x="365760" y="1353312"/>
-          <a:ext cx="8412479" cy="347472"/>
-        </p:xfrm>
-        <a:graphic>
-          <a:graphicData uri="http://schemas.openxmlformats.org/drawingml/2006/table">
-            <a:tbl>
-              <a:tblPr firstRow="1" bandRow="1">
-                <a:tableStyleId>{5C22544A-7EE6-4342-B048-85BDC9FD1C3A}</a:tableStyleId>
-              </a:tblPr>
-              <a:tblGrid>
-                <a:gridCol w="2271369"/>
-                <a:gridCol w="6141110"/>
-              </a:tblGrid>
-              <a:tr h="347472">
-                <a:tc>
-                  <a:txBody>
-                    <a:bodyPr wrap="none"/>
-                    <a:lstStyle/>
-                    <a:p>
-                      <a:pPr>
-                        <a:lnSpc>
-                          <a:spcPts val="1600"/>
-                        </a:lnSpc>
-                        <a:spcAft>
-                          <a:spcPts val="0"/>
-                        </a:spcAft>
-                        <a:defRPr sz="1200" b="1">
-                          <a:solidFill>
-                            <a:srgbClr val="FFFFFF"/>
-                          </a:solidFill>
-                          <a:latin typeface="Arial"/>
-                        </a:defRPr>
-                      </a:pPr>
-                      <a:r>
-                        <a:t>Field</a:t>
-                      </a:r>
-                    </a:p>
-                  </a:txBody>
-                  <a:tcPr marL="82296" marR="82296" marT="64008" marB="64008">
-                    <a:solidFill>
-                      <a:srgbClr val="16787C"/>
-                    </a:solidFill>
-                  </a:tcPr>
-                </a:tc>
-                <a:tc>
-                  <a:txBody>
-                    <a:bodyPr wrap="none"/>
-                    <a:lstStyle/>
-                    <a:p>
-                      <a:pPr>
-                        <a:lnSpc>
-                          <a:spcPts val="1600"/>
-                        </a:lnSpc>
-                        <a:spcAft>
-                          <a:spcPts val="0"/>
-                        </a:spcAft>
-                        <a:defRPr sz="1200" b="1">
-                          <a:solidFill>
-                            <a:srgbClr val="FFFFFF"/>
-                          </a:solidFill>
-                          <a:latin typeface="Arial"/>
-                        </a:defRPr>
-                      </a:pPr>
-                      <a:r>
-                        <a:t>Recorded detail</a:t>
-                      </a:r>
-                    </a:p>
-                  </a:txBody>
-                  <a:tcPr marL="82296" marR="82296" marT="64008" marB="64008">
-                    <a:solidFill>
-                      <a:srgbClr val="16787C"/>
-                    </a:solidFill>
-                  </a:tcPr>
-                </a:tc>
-              </a:tr>
-            </a:tbl>
-          </a:graphicData>
-        </a:graphic>
-      </p:graphicFrame>
-      <p:graphicFrame>
-        <p:nvGraphicFramePr>
-          <p:cNvPr id="7" name="Table 6"/>
-          <p:cNvGraphicFramePr>
-            <a:graphicFrameLocks noGrp="1"/>
-          </p:cNvGraphicFramePr>
-          <p:nvPr/>
-        </p:nvGraphicFramePr>
-        <p:xfrm>
-          <a:off x="365760" y="1700784"/>
-          <a:ext cx="8412479" cy="755904"/>
-        </p:xfrm>
-        <a:graphic>
-          <a:graphicData uri="http://schemas.openxmlformats.org/drawingml/2006/table">
-            <a:tbl>
-              <a:tblPr firstRow="1" bandRow="1">
-                <a:tableStyleId>{5C22544A-7EE6-4342-B048-85BDC9FD1C3A}</a:tableStyleId>
-              </a:tblPr>
-              <a:tblGrid>
-                <a:gridCol w="2271369"/>
-                <a:gridCol w="6141110"/>
-              </a:tblGrid>
-              <a:tr h="755904">
-                <a:tc>
-                  <a:txBody>
-                    <a:bodyPr wrap="none"/>
-                    <a:lstStyle/>
-                    <a:p>
-                      <a:pPr>
-                        <a:lnSpc>
-                          <a:spcPts val="1600"/>
-                        </a:lnSpc>
-                        <a:spcAft>
-                          <a:spcPts val="0"/>
-                        </a:spcAft>
-                        <a:defRPr sz="1200" b="0">
-                          <a:solidFill>
-                            <a:srgbClr val="21243A"/>
-                          </a:solidFill>
-                          <a:latin typeface="Arial"/>
-                        </a:defRPr>
-                      </a:pPr>
-                      <a:r>
-                        <a:t>Software citation</a:t>
-                      </a:r>
-                    </a:p>
-                  </a:txBody>
-                  <a:tcPr marL="82296" marR="82296" marT="64008" marB="64008">
-                    <a:solidFill>
-                      <a:srgbClr val="F1F7F7"/>
-                    </a:solidFill>
-                  </a:tcPr>
-                </a:tc>
-                <a:tc>
-                  <a:txBody>
-                    <a:bodyPr wrap="none"/>
-                    <a:lstStyle/>
-                    <a:p>
-                      <a:pPr>
-                        <a:lnSpc>
-                          <a:spcPts val="1600"/>
-                        </a:lnSpc>
-                        <a:spcAft>
-                          <a:spcPts val="0"/>
-                        </a:spcAft>
-                        <a:defRPr sz="1200" b="0">
-                          <a:solidFill>
-                            <a:srgbClr val="21243A"/>
-                          </a:solidFill>
-                          <a:latin typeface="Arial"/>
-                        </a:defRPr>
-                      </a:pPr>
-                      <a:r>
-                        <a:t>Martin, S. (2026) SDA Vision: Synthetic-media Discourse Analysis (version 0.1.0)</a:t>
-                      </a:r>
-                    </a:p>
-                    <a:p>
-                      <a:pPr>
-                        <a:lnSpc>
-                          <a:spcPts val="1600"/>
-                        </a:lnSpc>
-                        <a:spcAft>
-                          <a:spcPts val="0"/>
-                        </a:spcAft>
-                        <a:defRPr sz="1200" b="0">
-                          <a:solidFill>
-                            <a:srgbClr val="21243A"/>
-                          </a:solidFill>
-                          <a:latin typeface="Arial"/>
-                        </a:defRPr>
-                      </a:pPr>
-                      <a:r>
-                        <a:t>[Computer software]. Manchester Metropolitan University. Available at:</a:t>
-                      </a:r>
-                    </a:p>
-                    <a:p>
-                      <a:pPr>
-                        <a:lnSpc>
-                          <a:spcPts val="1600"/>
-                        </a:lnSpc>
-                        <a:spcAft>
-                          <a:spcPts val="0"/>
-                        </a:spcAft>
-                        <a:defRPr sz="1200" b="0">
-                          <a:solidFill>
-                            <a:srgbClr val="21243A"/>
-                          </a:solidFill>
-                          <a:latin typeface="Arial"/>
-                        </a:defRPr>
-                      </a:pPr>
-                      <a:r>
-                        <a:t>https://sdavision.io/</a:t>
-                      </a:r>
-                    </a:p>
-                  </a:txBody>
-                  <a:tcPr marL="82296" marR="82296" marT="64008" marB="64008">
-                    <a:solidFill>
-                      <a:srgbClr val="F1F7F7"/>
-                    </a:solidFill>
-                  </a:tcPr>
-                </a:tc>
-              </a:tr>
-            </a:tbl>
-          </a:graphicData>
-        </a:graphic>
-      </p:graphicFrame>
-      <p:graphicFrame>
-        <p:nvGraphicFramePr>
-          <p:cNvPr id="8" name="Table 7"/>
-          <p:cNvGraphicFramePr>
-            <a:graphicFrameLocks noGrp="1"/>
-          </p:cNvGraphicFramePr>
-          <p:nvPr/>
-        </p:nvGraphicFramePr>
-        <p:xfrm>
-          <a:off x="365760" y="2456688"/>
-          <a:ext cx="8412479" cy="552704"/>
-        </p:xfrm>
-        <a:graphic>
-          <a:graphicData uri="http://schemas.openxmlformats.org/drawingml/2006/table">
-            <a:tbl>
-              <a:tblPr firstRow="1" bandRow="1">
-                <a:tableStyleId>{5C22544A-7EE6-4342-B048-85BDC9FD1C3A}</a:tableStyleId>
-              </a:tblPr>
-              <a:tblGrid>
-                <a:gridCol w="2271369"/>
-                <a:gridCol w="6141110"/>
-              </a:tblGrid>
-              <a:tr h="552704">
-                <a:tc>
-                  <a:txBody>
-                    <a:bodyPr wrap="none"/>
-                    <a:lstStyle/>
-                    <a:p>
-                      <a:pPr>
-                        <a:lnSpc>
-                          <a:spcPts val="1600"/>
-                        </a:lnSpc>
-                        <a:spcAft>
-                          <a:spcPts val="0"/>
-                        </a:spcAft>
-                        <a:defRPr sz="1200" b="0">
-                          <a:solidFill>
-                            <a:srgbClr val="21243A"/>
-                          </a:solidFill>
-                          <a:latin typeface="Arial"/>
-                        </a:defRPr>
-                      </a:pPr>
-                      <a:r>
-                        <a:t>Software creator</a:t>
-                      </a:r>
-                    </a:p>
-                  </a:txBody>
-                  <a:tcPr marL="82296" marR="82296" marT="64008" marB="64008">
-                    <a:solidFill>
-                      <a:srgbClr val="FFFFFF"/>
-                    </a:solidFill>
-                  </a:tcPr>
-                </a:tc>
-                <a:tc>
-                  <a:txBody>
-                    <a:bodyPr wrap="none"/>
-                    <a:lstStyle/>
-                    <a:p>
-                      <a:pPr>
-                        <a:lnSpc>
-                          <a:spcPts val="1600"/>
-                        </a:lnSpc>
-                        <a:spcAft>
-                          <a:spcPts val="0"/>
-                        </a:spcAft>
-                        <a:defRPr sz="1200" b="0">
-                          <a:solidFill>
-                            <a:srgbClr val="21243A"/>
-                          </a:solidFill>
-                          <a:latin typeface="Arial"/>
-                        </a:defRPr>
-                      </a:pPr>
-                      <a:r>
-                        <a:t>Dr Sam Martin, Smart Data Research UK (UKRI) Fellow, Manchester Metropolitan</a:t>
-                      </a:r>
-                    </a:p>
-                    <a:p>
-                      <a:pPr>
-                        <a:lnSpc>
-                          <a:spcPts val="1600"/>
-                        </a:lnSpc>
-                        <a:spcAft>
-                          <a:spcPts val="0"/>
-                        </a:spcAft>
-                        <a:defRPr sz="1200" b="0">
-                          <a:solidFill>
-                            <a:srgbClr val="21243A"/>
-                          </a:solidFill>
-                          <a:latin typeface="Arial"/>
-                        </a:defRPr>
-                      </a:pPr>
-                      <a:r>
-                        <a:t>University (MMU). ORCID: https://orcid.org/0000-0002-4466-8374.</a:t>
-                      </a:r>
-                    </a:p>
-                  </a:txBody>
-                  <a:tcPr marL="82296" marR="82296" marT="64008" marB="64008">
-                    <a:solidFill>
-                      <a:srgbClr val="FFFFFF"/>
-                    </a:solidFill>
-                  </a:tcPr>
-                </a:tc>
-              </a:tr>
-            </a:tbl>
-          </a:graphicData>
-        </a:graphic>
-      </p:graphicFrame>
-      <p:graphicFrame>
-        <p:nvGraphicFramePr>
-          <p:cNvPr id="9" name="Table 8"/>
-          <p:cNvGraphicFramePr>
-            <a:graphicFrameLocks noGrp="1"/>
-          </p:cNvGraphicFramePr>
-          <p:nvPr/>
-        </p:nvGraphicFramePr>
-        <p:xfrm>
-          <a:off x="365760" y="3009392"/>
-          <a:ext cx="8412479" cy="552704"/>
-        </p:xfrm>
-        <a:graphic>
-          <a:graphicData uri="http://schemas.openxmlformats.org/drawingml/2006/table">
-            <a:tbl>
-              <a:tblPr firstRow="1" bandRow="1">
-                <a:tableStyleId>{5C22544A-7EE6-4342-B048-85BDC9FD1C3A}</a:tableStyleId>
-              </a:tblPr>
-              <a:tblGrid>
-                <a:gridCol w="2271369"/>
-                <a:gridCol w="6141110"/>
-              </a:tblGrid>
-              <a:tr h="552704">
-                <a:tc>
-                  <a:txBody>
-                    <a:bodyPr wrap="none"/>
-                    <a:lstStyle/>
-                    <a:p>
-                      <a:pPr>
-                        <a:lnSpc>
-                          <a:spcPts val="1600"/>
-                        </a:lnSpc>
-                        <a:spcAft>
-                          <a:spcPts val="0"/>
-                        </a:spcAft>
-                        <a:defRPr sz="1200" b="0">
-                          <a:solidFill>
-                            <a:srgbClr val="21243A"/>
-                          </a:solidFill>
-                          <a:latin typeface="Arial"/>
-                        </a:defRPr>
-                      </a:pPr>
-                      <a:r>
-                        <a:t>Funding acknowledgement</a:t>
-                      </a:r>
-                    </a:p>
-                  </a:txBody>
-                  <a:tcPr marL="82296" marR="82296" marT="64008" marB="64008">
-                    <a:solidFill>
-                      <a:srgbClr val="F1F7F7"/>
-                    </a:solidFill>
-                  </a:tcPr>
-                </a:tc>
-                <a:tc>
-                  <a:txBody>
-                    <a:bodyPr wrap="none"/>
-                    <a:lstStyle/>
-                    <a:p>
-                      <a:pPr>
-                        <a:lnSpc>
-                          <a:spcPts val="1600"/>
-                        </a:lnSpc>
-                        <a:spcAft>
-                          <a:spcPts val="0"/>
-                        </a:spcAft>
-                        <a:defRPr sz="1200" b="0">
-                          <a:solidFill>
-                            <a:srgbClr val="21243A"/>
-                          </a:solidFill>
-                          <a:latin typeface="Arial"/>
-                        </a:defRPr>
-                      </a:pPr>
-                      <a:r>
-                        <a:t>This work was supported by Smart Data Research UK, a UKRI investment; Grant</a:t>
-                      </a:r>
-                    </a:p>
-                    <a:p>
-                      <a:pPr>
-                        <a:lnSpc>
-                          <a:spcPts val="1600"/>
-                        </a:lnSpc>
-                        <a:spcAft>
-                          <a:spcPts val="0"/>
-                        </a:spcAft>
-                        <a:defRPr sz="1200" b="0">
-                          <a:solidFill>
-                            <a:srgbClr val="21243A"/>
-                          </a:solidFill>
-                          <a:latin typeface="Arial"/>
-                        </a:defRPr>
-                      </a:pPr>
-                      <a:r>
-                        <a:t>number UKRI4010.</a:t>
-                      </a:r>
-                    </a:p>
-                  </a:txBody>
-                  <a:tcPr marL="82296" marR="82296" marT="64008" marB="64008">
-                    <a:solidFill>
-                      <a:srgbClr val="F1F7F7"/>
-                    </a:solidFill>
-                  </a:tcPr>
-                </a:tc>
-              </a:tr>
-            </a:tbl>
-          </a:graphicData>
-        </a:graphic>
-      </p:graphicFrame>
-      <p:graphicFrame>
-        <p:nvGraphicFramePr>
-          <p:cNvPr id="10" name="Table 9"/>
-          <p:cNvGraphicFramePr>
-            <a:graphicFrameLocks noGrp="1"/>
-          </p:cNvGraphicFramePr>
-          <p:nvPr/>
-        </p:nvGraphicFramePr>
-        <p:xfrm>
-          <a:off x="365760" y="3562095"/>
-          <a:ext cx="8412479" cy="755904"/>
-        </p:xfrm>
-        <a:graphic>
-          <a:graphicData uri="http://schemas.openxmlformats.org/drawingml/2006/table">
-            <a:tbl>
-              <a:tblPr firstRow="1" bandRow="1">
-                <a:tableStyleId>{5C22544A-7EE6-4342-B048-85BDC9FD1C3A}</a:tableStyleId>
-              </a:tblPr>
-              <a:tblGrid>
-                <a:gridCol w="2271369"/>
-                <a:gridCol w="6141110"/>
-              </a:tblGrid>
-              <a:tr h="755904">
-                <a:tc>
-                  <a:txBody>
-                    <a:bodyPr wrap="none"/>
-                    <a:lstStyle/>
-                    <a:p>
-                      <a:pPr>
-                        <a:lnSpc>
-                          <a:spcPts val="1600"/>
-                        </a:lnSpc>
-                        <a:spcAft>
-                          <a:spcPts val="0"/>
-                        </a:spcAft>
-                        <a:defRPr sz="1200" b="0">
-                          <a:solidFill>
-                            <a:srgbClr val="21243A"/>
-                          </a:solidFill>
-                          <a:latin typeface="Arial"/>
-                        </a:defRPr>
-                      </a:pPr>
-                      <a:r>
-                        <a:t>Analysis record</a:t>
-                      </a:r>
-                    </a:p>
-                  </a:txBody>
-                  <a:tcPr marL="82296" marR="82296" marT="64008" marB="64008">
-                    <a:solidFill>
-                      <a:srgbClr val="FFFFFF"/>
-                    </a:solidFill>
-                  </a:tcPr>
-                </a:tc>
-                <a:tc>
-                  <a:txBody>
-                    <a:bodyPr wrap="none"/>
-                    <a:lstStyle/>
-                    <a:p>
-                      <a:pPr>
-                        <a:lnSpc>
-                          <a:spcPts val="1600"/>
-                        </a:lnSpc>
-                        <a:spcAft>
-                          <a:spcPts val="0"/>
-                        </a:spcAft>
-                        <a:defRPr sz="1200" b="0">
-                          <a:solidFill>
-                            <a:srgbClr val="21243A"/>
-                          </a:solidFill>
-                          <a:latin typeface="Arial"/>
-                        </a:defRPr>
-                      </a:pPr>
-                      <a:r>
-                        <a:t>File: illustration-1.png; media type: image; recorded at:</a:t>
-                      </a:r>
-                    </a:p>
-                    <a:p>
-                      <a:pPr>
-                        <a:lnSpc>
-                          <a:spcPts val="1600"/>
-                        </a:lnSpc>
-                        <a:spcAft>
-                          <a:spcPts val="0"/>
-                        </a:spcAft>
-                        <a:defRPr sz="1200" b="0">
-                          <a:solidFill>
-                            <a:srgbClr val="21243A"/>
-                          </a:solidFill>
-                          <a:latin typeface="Arial"/>
-                        </a:defRPr>
-                      </a:pPr>
-                      <a:r>
-                        <a:t>2026-09-26T22:31:03+00:00; models: claude-opus-5-5, gemini-3.8-flash,</a:t>
-                      </a:r>
-                    </a:p>
-                    <a:p>
-                      <a:pPr>
-                        <a:lnSpc>
-                          <a:spcPts val="1600"/>
-                        </a:lnSpc>
-                        <a:spcAft>
-                          <a:spcPts val="0"/>
-                        </a:spcAft>
-                        <a:defRPr sz="1200" b="0">
-                          <a:solidFill>
-                            <a:srgbClr val="21243A"/>
-                          </a:solidFill>
-                          <a:latin typeface="Arial"/>
-                        </a:defRPr>
-                      </a:pPr>
-                      <a:r>
-                        <a:t>gpt-6-astra.</a:t>
-                      </a:r>
-                    </a:p>
-                  </a:txBody>
-                  <a:tcPr marL="82296" marR="82296" marT="64008" marB="64008">
-                    <a:solidFill>
-                      <a:srgbClr val="FFFFFF"/>
-                    </a:solidFill>
-                  </a:tcPr>
-                </a:tc>
-              </a:tr>
-            </a:tbl>
-          </a:graphicData>
-        </a:graphic>
-      </p:graphicFrame>
-    </p:spTree>
-  </p:cSld>
-  <p:clrMapOvr>
-    <a:masterClrMapping/>
-  </p:clrMapOvr>
-</p:sld>
-</file>
-
-<file path=ppt/slides/slide18.xml><?xml version="1.0" encoding="utf-8"?>
-<p:sld xmlns:a="http://schemas.openxmlformats.org/drawingml/2006/main" xmlns:p="http://schemas.openxmlformats.org/presentationml/2006/main" xmlns:r="http://schemas.openxmlformats.org/officeDocument/2006/relationships">
-  <p:cSld>
-    <p:spTree>
-      <p:nvGrpSpPr>
-        <p:cNvPr id="1" name=""/>
-        <p:cNvGrpSpPr/>
-        <p:nvPr/>
-      </p:nvGrpSpPr>
-      <p:grpSpPr/>
-      <p:sp>
-        <p:nvSpPr>
-          <p:cNvPr id="2" name="TextBox 1"/>
-          <p:cNvSpPr txBox="1"/>
-          <p:nvPr/>
-        </p:nvSpPr>
-        <p:spPr>
-          <a:xfrm>
-            <a:off x="365760" y="219456"/>
-            <a:ext cx="8412480" cy="228600"/>
-          </a:xfrm>
-          <a:prstGeom prst="rect">
-            <a:avLst/>
-          </a:prstGeom>
-          <a:noFill/>
-        </p:spPr>
-        <p:txBody>
-          <a:bodyPr wrap="square" lIns="0" rIns="0" tIns="0" bIns="0">
-            <a:spAutoFit/>
-          </a:bodyPr>
-          <a:lstStyle/>
-          <a:p>
-            <a:pPr>
-              <a:lnSpc>
-                <a:spcPct val="115000"/>
-              </a:lnSpc>
-              <a:spcAft>
-                <a:spcPts val="0"/>
-              </a:spcAft>
-              <a:defRPr sz="1100" b="1">
-                <a:solidFill>
-                  <a:srgbClr val="C5006A"/>
-                </a:solidFill>
-                <a:latin typeface="Arial"/>
-              </a:defRPr>
-            </a:pPr>
-            <a:r>
-              <a:t>SDA VISION / RESEARCH REPORT</a:t>
-            </a:r>
-          </a:p>
-        </p:txBody>
-      </p:sp>
-      <p:sp>
-        <p:nvSpPr>
-          <p:cNvPr id="3" name="TextBox 2"/>
-          <p:cNvSpPr txBox="1"/>
-          <p:nvPr/>
-        </p:nvSpPr>
-        <p:spPr>
-          <a:xfrm>
-            <a:off x="365760" y="658368"/>
-            <a:ext cx="8412480" cy="612648"/>
-          </a:xfrm>
-          <a:prstGeom prst="rect">
-            <a:avLst/>
-          </a:prstGeom>
-          <a:noFill/>
-        </p:spPr>
-        <p:txBody>
-          <a:bodyPr wrap="square" lIns="0" rIns="0" tIns="0" bIns="0">
-            <a:spAutoFit/>
-          </a:bodyPr>
-          <a:lstStyle/>
-          <a:p>
-            <a:pPr>
-              <a:lnSpc>
-                <a:spcPct val="115000"/>
-              </a:lnSpc>
-              <a:spcAft>
-                <a:spcPts val="0"/>
-              </a:spcAft>
-              <a:defRPr sz="2200" b="1">
-                <a:solidFill>
-                  <a:srgbClr val="21243A"/>
-                </a:solidFill>
-                <a:latin typeface="Arial"/>
-              </a:defRPr>
-            </a:pPr>
-            <a:r>
-              <a:t>File and analysis record</a:t>
-            </a:r>
-          </a:p>
-        </p:txBody>
-      </p:sp>
-      <p:sp>
-        <p:nvSpPr>
-          <p:cNvPr id="4" name="TextBox 3"/>
-          <p:cNvSpPr txBox="1"/>
-          <p:nvPr/>
-        </p:nvSpPr>
-        <p:spPr>
-          <a:xfrm>
-            <a:off x="365760" y="6291072"/>
-            <a:ext cx="8001000" cy="365760"/>
-          </a:xfrm>
-          <a:prstGeom prst="rect">
-            <a:avLst/>
-          </a:prstGeom>
-          <a:noFill/>
-        </p:spPr>
-        <p:txBody>
-          <a:bodyPr wrap="square" lIns="0" rIns="0" tIns="0" bIns="0">
-            <a:spAutoFit/>
-          </a:bodyPr>
-          <a:lstStyle/>
-          <a:p>
-            <a:pPr>
-              <a:lnSpc>
-                <a:spcPct val="115000"/>
-              </a:lnSpc>
-              <a:spcAft>
-                <a:spcPts val="0"/>
-              </a:spcAft>
-              <a:defRPr sz="800" b="0">
-                <a:solidFill>
-                  <a:srgbClr val="545B6D"/>
-                </a:solidFill>
-                <a:latin typeface="Arial"/>
-              </a:defRPr>
-            </a:pPr>
-            <a:r>
-              <a:t>Research assessment. Ratings are not calibrated probabilities.</a:t>
-            </a:r>
-          </a:p>
-        </p:txBody>
-      </p:sp>
-      <p:sp>
-        <p:nvSpPr>
-          <p:cNvPr id="5" name="TextBox 4"/>
-          <p:cNvSpPr txBox="1"/>
-          <p:nvPr/>
-        </p:nvSpPr>
-        <p:spPr>
-          <a:xfrm>
-            <a:off x="8394192" y="6318504"/>
-            <a:ext cx="365760" cy="228600"/>
-          </a:xfrm>
-          <a:prstGeom prst="rect">
-            <a:avLst/>
-          </a:prstGeom>
-          <a:noFill/>
-        </p:spPr>
-        <p:txBody>
-          <a:bodyPr wrap="square" lIns="0" rIns="0" tIns="0" bIns="0">
-            <a:spAutoFit/>
-          </a:bodyPr>
-          <a:lstStyle/>
-          <a:p>
-            <a:pPr>
-              <a:lnSpc>
-                <a:spcPct val="115000"/>
-              </a:lnSpc>
-              <a:spcAft>
-                <a:spcPts val="0"/>
-              </a:spcAft>
-              <a:defRPr sz="900" b="0">
-                <a:solidFill>
-                  <a:srgbClr val="545B6D"/>
-                </a:solidFill>
-                <a:latin typeface="Arial"/>
-              </a:defRPr>
-            </a:pPr>
-            <a:r>
-              <a:t>18</a:t>
             </a:r>
           </a:p>
         </p:txBody>
